--- a/preview_v7/cn/l-cn-bx-u3-3.pptx
+++ b/preview_v7/cn/l-cn-bx-u3-3.pptx
@@ -3142,14 +3142,58 @@
       </p:sp>
       <p:sp>
         <p:nvSpPr>
-          <p:cNvPr id="3" name="TextBox 2"/>
+          <p:cNvPr id="3" name="Rectangle 2"/>
+          <p:cNvSpPr/>
+          <p:nvPr/>
+        </p:nvSpPr>
+        <p:spPr>
+          <a:xfrm>
+            <a:off x="640080" y="960120"/>
+            <a:ext cx="822960" cy="38100"/>
+          </a:xfrm>
+          <a:prstGeom prst="rect">
+            <a:avLst/>
+          </a:prstGeom>
+          <a:solidFill>
+            <a:srgbClr val="C8A86B"/>
+          </a:solidFill>
+          <a:ln>
+            <a:noFill/>
+          </a:ln>
+          <a:effectLst/>
+        </p:spPr>
+        <p:style>
+          <a:lnRef idx="1">
+            <a:schemeClr val="accent1"/>
+          </a:lnRef>
+          <a:fillRef idx="3">
+            <a:schemeClr val="accent1"/>
+          </a:fillRef>
+          <a:effectRef idx="2">
+            <a:schemeClr val="accent1"/>
+          </a:effectRef>
+          <a:fontRef idx="minor">
+            <a:schemeClr val="lt1"/>
+          </a:fontRef>
+        </p:style>
+        <p:txBody>
+          <a:bodyPr rtlCol="0" anchor="ctr"/>
+          <a:lstStyle/>
+          <a:p>
+            <a:pPr algn="ctr"/>
+          </a:p>
+        </p:txBody>
+      </p:sp>
+      <p:sp>
+        <p:nvSpPr>
+          <p:cNvPr id="4" name="TextBox 3"/>
           <p:cNvSpPr txBox="1"/>
           <p:nvPr/>
         </p:nvSpPr>
         <p:spPr>
           <a:xfrm>
-            <a:off x="640080" y="640080"/>
-            <a:ext cx="10911535" cy="502920"/>
+            <a:off x="640080" y="1143000"/>
+            <a:ext cx="10515600" cy="457200"/>
           </a:xfrm>
           <a:prstGeom prst="rect">
             <a:avLst/>
@@ -3162,13 +3206,9 @@
           </a:bodyPr>
           <a:lstStyle/>
           <a:p>
-            <a:pPr algn="l">
-              <a:spcAft>
-                <a:spcPts val="0"/>
-              </a:spcAft>
-            </a:pPr>
-            <a:r>
-              <a:rPr sz="1200" b="1">
+            <a:pPr algn="l"/>
+            <a:r>
+              <a:rPr sz="1500" b="1">
                 <a:solidFill>
                   <a:srgbClr val="B23A2A"/>
                 </a:solidFill>
@@ -3176,21 +3216,58 @@
                 <a:ea typeface="微软雅黑"/>
                 <a:cs typeface="微软雅黑"/>
               </a:rPr>
-              <a:t>语文 · 必修下册 · 第3单元 实用性阅读与交流（知识性读物）</a:t>
-            </a:r>
-          </a:p>
-        </p:txBody>
-      </p:sp>
-      <p:sp>
-        <p:nvSpPr>
-          <p:cNvPr id="4" name="Rectangle 3"/>
+              <a:t>必修下册 · 第三单元 · 第三课时</a:t>
+            </a:r>
+          </a:p>
+        </p:txBody>
+      </p:sp>
+      <p:sp>
+        <p:nvSpPr>
+          <p:cNvPr id="5" name="TextBox 4"/>
+          <p:cNvSpPr txBox="1"/>
+          <p:nvPr/>
+        </p:nvSpPr>
+        <p:spPr>
+          <a:xfrm>
+            <a:off x="640080" y="1874519"/>
+            <a:ext cx="11247120" cy="1554480"/>
+          </a:xfrm>
+          <a:prstGeom prst="rect">
+            <a:avLst/>
+          </a:prstGeom>
+          <a:noFill/>
+        </p:spPr>
+        <p:txBody>
+          <a:bodyPr wrap="square" anchor="t" lIns="0" rIns="0" tIns="0" bIns="0">
+            <a:spAutoFit/>
+          </a:bodyPr>
+          <a:lstStyle/>
+          <a:p>
+            <a:pPr algn="l"/>
+            <a:r>
+              <a:rPr sz="4200" b="1">
+                <a:solidFill>
+                  <a:srgbClr val="1C2A33"/>
+                </a:solidFill>
+                <a:latin typeface="楷体"/>
+                <a:ea typeface="楷体"/>
+                <a:cs typeface="楷体"/>
+              </a:rPr>
+              <a:t>群文阅读——科学精神与科学表达比较</a:t>
+            </a:r>
+          </a:p>
+        </p:txBody>
+      </p:sp>
+      <p:sp>
+        <p:nvSpPr>
+          <p:cNvPr id="6" name="Rectangle 5"/>
           <p:cNvSpPr/>
           <p:nvPr/>
         </p:nvSpPr>
         <p:spPr>
           <a:xfrm>
-            <a:off x="640080" y="1207008"/>
-            <a:ext cx="822960" cy="30480"/>
+            <a:off x="640080" y="3429000"/>
+            <a:ext cx="1280160" cy="30480"/>
           </a:xfrm>
           <a:prstGeom prst="rect">
             <a:avLst/>
@@ -3227,14 +3304,14 @@
       </p:sp>
       <p:sp>
         <p:nvSpPr>
-          <p:cNvPr id="5" name="TextBox 4"/>
+          <p:cNvPr id="7" name="TextBox 6"/>
           <p:cNvSpPr txBox="1"/>
           <p:nvPr/>
         </p:nvSpPr>
         <p:spPr>
           <a:xfrm>
-            <a:off x="640080" y="1737360"/>
-            <a:ext cx="10911535" cy="2011680"/>
+            <a:off x="640080" y="3657600"/>
+            <a:ext cx="11155680" cy="1097280"/>
           </a:xfrm>
           <a:prstGeom prst="rect">
             <a:avLst/>
@@ -3249,33 +3326,33 @@
           <a:p>
             <a:pPr algn="l">
               <a:lnSpc>
-                <a:spcPct val="115000"/>
+                <a:spcPct val="140000"/>
               </a:lnSpc>
             </a:pPr>
             <a:r>
-              <a:rPr sz="4000" b="1">
-                <a:solidFill>
-                  <a:srgbClr val="1C2A33"/>
+              <a:rPr sz="1900" b="1">
+                <a:solidFill>
+                  <a:srgbClr val="2E7D6B"/>
                 </a:solidFill>
                 <a:latin typeface="楷体"/>
                 <a:ea typeface="楷体"/>
                 <a:cs typeface="楷体"/>
               </a:rPr>
-              <a:t>群文阅读——科学精神与科学表达比较</a:t>
-            </a:r>
-          </a:p>
-        </p:txBody>
-      </p:sp>
-      <p:sp>
-        <p:nvSpPr>
-          <p:cNvPr id="6" name="TextBox 5"/>
+              <a:t>同读科学，异在写法——把两篇知识性读物比出表达范式。</a:t>
+            </a:r>
+          </a:p>
+        </p:txBody>
+      </p:sp>
+      <p:sp>
+        <p:nvSpPr>
+          <p:cNvPr id="8" name="TextBox 7"/>
           <p:cNvSpPr txBox="1"/>
           <p:nvPr/>
         </p:nvSpPr>
         <p:spPr>
           <a:xfrm>
-            <a:off x="640080" y="3840480"/>
-            <a:ext cx="10911535" cy="457200"/>
+            <a:off x="640080" y="4892040"/>
+            <a:ext cx="10972800" cy="822960"/>
           </a:xfrm>
           <a:prstGeom prst="rect">
             <a:avLst/>
@@ -3288,98 +3365,21 @@
           </a:bodyPr>
           <a:lstStyle/>
           <a:p>
-            <a:pPr algn="l"/>
-            <a:r>
-              <a:rPr sz="1700" b="1">
-                <a:solidFill>
-                  <a:srgbClr val="B23A2A"/>
-                </a:solidFill>
-                <a:latin typeface="微软雅黑"/>
-                <a:ea typeface="微软雅黑"/>
-                <a:cs typeface="微软雅黑"/>
+            <a:pPr algn="l">
+              <a:lnSpc>
+                <a:spcPct val="140000"/>
+              </a:lnSpc>
+            </a:pPr>
+            <a:r>
+              <a:rPr sz="1400" b="0">
+                <a:solidFill>
+                  <a:srgbClr val="6B6258"/>
+                </a:solidFill>
+                <a:latin typeface="楷体"/>
+                <a:ea typeface="楷体"/>
+                <a:cs typeface="楷体"/>
               </a:rPr>
-              <a:t>群文阅读  ·  第3课时  ·  45分钟</a:t>
-            </a:r>
-          </a:p>
-        </p:txBody>
-      </p:sp>
-      <p:sp>
-        <p:nvSpPr>
-          <p:cNvPr id="7" name="Rectangle 6"/>
-          <p:cNvSpPr/>
-          <p:nvPr/>
-        </p:nvSpPr>
-        <p:spPr>
-          <a:xfrm>
-            <a:off x="640080" y="5394960"/>
-            <a:ext cx="2011680" cy="33020"/>
-          </a:xfrm>
-          <a:prstGeom prst="rect">
-            <a:avLst/>
-          </a:prstGeom>
-          <a:solidFill>
-            <a:srgbClr val="C8A86B"/>
-          </a:solidFill>
-          <a:ln>
-            <a:noFill/>
-          </a:ln>
-          <a:effectLst/>
-        </p:spPr>
-        <p:style>
-          <a:lnRef idx="1">
-            <a:schemeClr val="accent1"/>
-          </a:lnRef>
-          <a:fillRef idx="3">
-            <a:schemeClr val="accent1"/>
-          </a:fillRef>
-          <a:effectRef idx="2">
-            <a:schemeClr val="accent1"/>
-          </a:effectRef>
-          <a:fontRef idx="minor">
-            <a:schemeClr val="lt1"/>
-          </a:fontRef>
-        </p:style>
-        <p:txBody>
-          <a:bodyPr rtlCol="0" anchor="ctr"/>
-          <a:lstStyle/>
-          <a:p>
-            <a:pPr algn="ctr"/>
-          </a:p>
-        </p:txBody>
-      </p:sp>
-      <p:sp>
-        <p:nvSpPr>
-          <p:cNvPr id="8" name="TextBox 7"/>
-          <p:cNvSpPr txBox="1"/>
-          <p:nvPr/>
-        </p:nvSpPr>
-        <p:spPr>
-          <a:xfrm>
-            <a:off x="640080" y="5623560"/>
-            <a:ext cx="10911535" cy="548640"/>
-          </a:xfrm>
-          <a:prstGeom prst="rect">
-            <a:avLst/>
-          </a:prstGeom>
-          <a:noFill/>
-        </p:spPr>
-        <p:txBody>
-          <a:bodyPr wrap="square" anchor="t" lIns="0" rIns="0" tIns="0" bIns="0">
-            <a:spAutoFit/>
-          </a:bodyPr>
-          <a:lstStyle/>
-          <a:p>
-            <a:pPr algn="l"/>
-            <a:r>
-              <a:rPr sz="1400" b="0">
-                <a:solidFill>
-                  <a:srgbClr val="6B6258"/>
-                </a:solidFill>
-                <a:latin typeface="微软雅黑"/>
-                <a:ea typeface="微软雅黑"/>
-                <a:cs typeface="微软雅黑"/>
-              </a:rPr>
-              <a:t>学习任务群：实用性阅读与交流    |    年级：高一</a:t>
+              <a:t>实用性阅读与交流（知识性读物）</a:t>
             </a:r>
           </a:p>
         </p:txBody>
@@ -3519,7 +3519,7 @@
                 <a:ea typeface="微软雅黑"/>
                 <a:cs typeface="微软雅黑"/>
               </a:rPr>
-              <a:t>学习目标</a:t>
+              <a:t>本课目标</a:t>
             </a:r>
           </a:p>
         </p:txBody>
@@ -3570,14 +3570,51 @@
       </p:sp>
       <p:sp>
         <p:nvSpPr>
-          <p:cNvPr id="5" name="Rounded Rectangle 4"/>
+          <p:cNvPr id="5" name="TextBox 4"/>
+          <p:cNvSpPr txBox="1"/>
+          <p:nvPr/>
+        </p:nvSpPr>
+        <p:spPr>
+          <a:xfrm>
+            <a:off x="640080" y="1325880"/>
+            <a:ext cx="10058400" cy="640080"/>
+          </a:xfrm>
+          <a:prstGeom prst="rect">
+            <a:avLst/>
+          </a:prstGeom>
+          <a:noFill/>
+        </p:spPr>
+        <p:txBody>
+          <a:bodyPr wrap="square" anchor="t" lIns="0" rIns="0" tIns="0" bIns="0">
+            <a:spAutoFit/>
+          </a:bodyPr>
+          <a:lstStyle/>
+          <a:p>
+            <a:pPr algn="l"/>
+            <a:r>
+              <a:rPr sz="3000" b="1">
+                <a:solidFill>
+                  <a:srgbClr val="1C2A33"/>
+                </a:solidFill>
+                <a:latin typeface="楷体"/>
+                <a:ea typeface="楷体"/>
+                <a:cs typeface="楷体"/>
+              </a:rPr>
+              <a:t>四向学习目标</a:t>
+            </a:r>
+          </a:p>
+        </p:txBody>
+      </p:sp>
+      <p:sp>
+        <p:nvSpPr>
+          <p:cNvPr id="6" name="Rounded Rectangle 5"/>
           <p:cNvSpPr/>
           <p:nvPr/>
         </p:nvSpPr>
         <p:spPr>
           <a:xfrm>
-            <a:off x="640080" y="1417320"/>
-            <a:ext cx="5349240" cy="2057400"/>
+            <a:off x="640080" y="2377440"/>
+            <a:ext cx="2453563" cy="3383280"/>
           </a:xfrm>
           <a:prstGeom prst="roundRect">
             <a:avLst/>
@@ -3585,7 +3622,7 @@
           <a:solidFill>
             <a:srgbClr val="FFFFFF"/>
           </a:solidFill>
-          <a:ln w="22860">
+          <a:ln w="20320">
             <a:solidFill>
               <a:srgbClr val="B23A2A"/>
             </a:solidFill>
@@ -3616,14 +3653,14 @@
       </p:sp>
       <p:sp>
         <p:nvSpPr>
-          <p:cNvPr id="6" name="Oval 5"/>
+          <p:cNvPr id="7" name="Oval 6"/>
           <p:cNvSpPr/>
           <p:nvPr/>
         </p:nvSpPr>
         <p:spPr>
           <a:xfrm>
-            <a:off x="804672" y="1581912"/>
-            <a:ext cx="457200" cy="457200"/>
+            <a:off x="1482813" y="2670048"/>
+            <a:ext cx="768096" cy="768096"/>
           </a:xfrm>
           <a:prstGeom prst="ellipse">
             <a:avLst/>
@@ -3660,14 +3697,14 @@
       </p:sp>
       <p:sp>
         <p:nvSpPr>
-          <p:cNvPr id="7" name="TextBox 6"/>
+          <p:cNvPr id="8" name="TextBox 7"/>
           <p:cNvSpPr txBox="1"/>
           <p:nvPr/>
         </p:nvSpPr>
         <p:spPr>
           <a:xfrm>
-            <a:off x="804672" y="1636776"/>
-            <a:ext cx="457200" cy="384048"/>
+            <a:off x="1482813" y="2834640"/>
+            <a:ext cx="768096" cy="457200"/>
           </a:xfrm>
           <a:prstGeom prst="rect">
             <a:avLst/>
@@ -3682,29 +3719,66 @@
           <a:p>
             <a:pPr algn="ctr"/>
             <a:r>
-              <a:rPr sz="1600" b="1">
+              <a:rPr sz="2200" b="1">
                 <a:solidFill>
                   <a:srgbClr val="FFFFFF"/>
+                </a:solidFill>
+                <a:latin typeface="楷体"/>
+                <a:ea typeface="楷体"/>
+                <a:cs typeface="楷体"/>
+              </a:rPr>
+              <a:t>1</a:t>
+            </a:r>
+          </a:p>
+        </p:txBody>
+      </p:sp>
+      <p:sp>
+        <p:nvSpPr>
+          <p:cNvPr id="9" name="TextBox 8"/>
+          <p:cNvSpPr txBox="1"/>
+          <p:nvPr/>
+        </p:nvSpPr>
+        <p:spPr>
+          <a:xfrm>
+            <a:off x="822960" y="3703320"/>
+            <a:ext cx="2087803" cy="548640"/>
+          </a:xfrm>
+          <a:prstGeom prst="rect">
+            <a:avLst/>
+          </a:prstGeom>
+          <a:noFill/>
+        </p:spPr>
+        <p:txBody>
+          <a:bodyPr wrap="square" anchor="t" lIns="0" rIns="0" tIns="0" bIns="0">
+            <a:spAutoFit/>
+          </a:bodyPr>
+          <a:lstStyle/>
+          <a:p>
+            <a:pPr algn="ctr"/>
+            <a:r>
+              <a:rPr sz="1700" b="1">
+                <a:solidFill>
+                  <a:srgbClr val="B23A2A"/>
                 </a:solidFill>
                 <a:latin typeface="微软雅黑"/>
                 <a:ea typeface="微软雅黑"/>
                 <a:cs typeface="微软雅黑"/>
               </a:rPr>
-              <a:t>1</a:t>
-            </a:r>
-          </a:p>
-        </p:txBody>
-      </p:sp>
-      <p:sp>
-        <p:nvSpPr>
-          <p:cNvPr id="8" name="TextBox 7"/>
+              <a:t>语言能力</a:t>
+            </a:r>
+          </a:p>
+        </p:txBody>
+      </p:sp>
+      <p:sp>
+        <p:nvSpPr>
+          <p:cNvPr id="10" name="TextBox 9"/>
           <p:cNvSpPr txBox="1"/>
           <p:nvPr/>
         </p:nvSpPr>
         <p:spPr>
           <a:xfrm>
-            <a:off x="1371600" y="1527048"/>
-            <a:ext cx="4434840" cy="457200"/>
+            <a:off x="859536" y="4297680"/>
+            <a:ext cx="2014651" cy="1325880"/>
           </a:xfrm>
           <a:prstGeom prst="rect">
             <a:avLst/>
@@ -3717,54 +3791,13 @@
           </a:bodyPr>
           <a:lstStyle/>
           <a:p>
-            <a:pPr algn="l">
+            <a:pPr algn="ctr">
               <a:lnSpc>
-                <a:spcPct val="110000"/>
+                <a:spcPct val="145000"/>
               </a:lnSpc>
             </a:pPr>
             <a:r>
-              <a:rPr sz="1600" b="1">
-                <a:solidFill>
-                  <a:srgbClr val="1C2A33"/>
-                </a:solidFill>
-                <a:latin typeface="微软雅黑"/>
-                <a:ea typeface="微软雅黑"/>
-                <a:cs typeface="微软雅黑"/>
-              </a:rPr>
-              <a:t>目标</a:t>
-            </a:r>
-          </a:p>
-        </p:txBody>
-      </p:sp>
-      <p:sp>
-        <p:nvSpPr>
-          <p:cNvPr id="9" name="TextBox 8"/>
-          <p:cNvSpPr txBox="1"/>
-          <p:nvPr/>
-        </p:nvSpPr>
-        <p:spPr>
-          <a:xfrm>
-            <a:off x="1371600" y="1965960"/>
-            <a:ext cx="4434840" cy="1417320"/>
-          </a:xfrm>
-          <a:prstGeom prst="rect">
-            <a:avLst/>
-          </a:prstGeom>
-          <a:noFill/>
-        </p:spPr>
-        <p:txBody>
-          <a:bodyPr wrap="square" anchor="t" lIns="0" rIns="0" tIns="0" bIns="0">
-            <a:spAutoFit/>
-          </a:bodyPr>
-          <a:lstStyle/>
-          <a:p>
-            <a:pPr algn="l">
-              <a:lnSpc>
-                <a:spcPct val="128000"/>
-              </a:lnSpc>
-            </a:pPr>
-            <a:r>
-              <a:rPr sz="1200" b="0">
+              <a:rPr sz="1300" b="0">
                 <a:solidFill>
                   <a:srgbClr val="1C2A33"/>
                 </a:solidFill>
@@ -3772,21 +3805,21 @@
                 <a:ea typeface="楷体"/>
                 <a:cs typeface="楷体"/>
               </a:rPr>
-              <a:t>语言能力：用双栏比较两文（人称/展开顺序/语言/科学精神），说出知识性读物的表达差异。</a:t>
-            </a:r>
-          </a:p>
-        </p:txBody>
-      </p:sp>
-      <p:sp>
-        <p:nvSpPr>
-          <p:cNvPr id="10" name="Rounded Rectangle 9"/>
+              <a:t>用双栏比较两文（人称/展开顺序/语言/科学精神），说出知识性读物的表达差异。</a:t>
+            </a:r>
+          </a:p>
+        </p:txBody>
+      </p:sp>
+      <p:sp>
+        <p:nvSpPr>
+          <p:cNvPr id="11" name="Rounded Rectangle 10"/>
           <p:cNvSpPr/>
           <p:nvPr/>
         </p:nvSpPr>
         <p:spPr>
           <a:xfrm>
-            <a:off x="6263640" y="1417320"/>
-            <a:ext cx="5349240" cy="2057400"/>
+            <a:off x="3459403" y="2377440"/>
+            <a:ext cx="2453563" cy="3383280"/>
           </a:xfrm>
           <a:prstGeom prst="roundRect">
             <a:avLst/>
@@ -3794,7 +3827,7 @@
           <a:solidFill>
             <a:srgbClr val="FFFFFF"/>
           </a:solidFill>
-          <a:ln w="22860">
+          <a:ln w="20320">
             <a:solidFill>
               <a:srgbClr val="B23A2A"/>
             </a:solidFill>
@@ -3825,14 +3858,14 @@
       </p:sp>
       <p:sp>
         <p:nvSpPr>
-          <p:cNvPr id="11" name="Oval 10"/>
+          <p:cNvPr id="12" name="Oval 11"/>
           <p:cNvSpPr/>
           <p:nvPr/>
         </p:nvSpPr>
         <p:spPr>
           <a:xfrm>
-            <a:off x="6428232" y="1581912"/>
-            <a:ext cx="457200" cy="457200"/>
+            <a:off x="4302137" y="2670048"/>
+            <a:ext cx="768096" cy="768096"/>
           </a:xfrm>
           <a:prstGeom prst="ellipse">
             <a:avLst/>
@@ -3869,14 +3902,14 @@
       </p:sp>
       <p:sp>
         <p:nvSpPr>
-          <p:cNvPr id="12" name="TextBox 11"/>
+          <p:cNvPr id="13" name="TextBox 12"/>
           <p:cNvSpPr txBox="1"/>
           <p:nvPr/>
         </p:nvSpPr>
         <p:spPr>
           <a:xfrm>
-            <a:off x="6428232" y="1636776"/>
-            <a:ext cx="457200" cy="384048"/>
+            <a:off x="4302137" y="2834640"/>
+            <a:ext cx="768096" cy="457200"/>
           </a:xfrm>
           <a:prstGeom prst="rect">
             <a:avLst/>
@@ -3891,29 +3924,66 @@
           <a:p>
             <a:pPr algn="ctr"/>
             <a:r>
-              <a:rPr sz="1600" b="1">
+              <a:rPr sz="2200" b="1">
                 <a:solidFill>
                   <a:srgbClr val="FFFFFF"/>
+                </a:solidFill>
+                <a:latin typeface="楷体"/>
+                <a:ea typeface="楷体"/>
+                <a:cs typeface="楷体"/>
+              </a:rPr>
+              <a:t>2</a:t>
+            </a:r>
+          </a:p>
+        </p:txBody>
+      </p:sp>
+      <p:sp>
+        <p:nvSpPr>
+          <p:cNvPr id="14" name="TextBox 13"/>
+          <p:cNvSpPr txBox="1"/>
+          <p:nvPr/>
+        </p:nvSpPr>
+        <p:spPr>
+          <a:xfrm>
+            <a:off x="3642283" y="3703320"/>
+            <a:ext cx="2087803" cy="548640"/>
+          </a:xfrm>
+          <a:prstGeom prst="rect">
+            <a:avLst/>
+          </a:prstGeom>
+          <a:noFill/>
+        </p:spPr>
+        <p:txBody>
+          <a:bodyPr wrap="square" anchor="t" lIns="0" rIns="0" tIns="0" bIns="0">
+            <a:spAutoFit/>
+          </a:bodyPr>
+          <a:lstStyle/>
+          <a:p>
+            <a:pPr algn="ctr"/>
+            <a:r>
+              <a:rPr sz="1700" b="1">
+                <a:solidFill>
+                  <a:srgbClr val="B23A2A"/>
                 </a:solidFill>
                 <a:latin typeface="微软雅黑"/>
                 <a:ea typeface="微软雅黑"/>
                 <a:cs typeface="微软雅黑"/>
               </a:rPr>
-              <a:t>2</a:t>
-            </a:r>
-          </a:p>
-        </p:txBody>
-      </p:sp>
-      <p:sp>
-        <p:nvSpPr>
-          <p:cNvPr id="13" name="TextBox 12"/>
+              <a:t>文化意识</a:t>
+            </a:r>
+          </a:p>
+        </p:txBody>
+      </p:sp>
+      <p:sp>
+        <p:nvSpPr>
+          <p:cNvPr id="15" name="TextBox 14"/>
           <p:cNvSpPr txBox="1"/>
           <p:nvPr/>
         </p:nvSpPr>
         <p:spPr>
           <a:xfrm>
-            <a:off x="6995160" y="1527048"/>
-            <a:ext cx="4434840" cy="457200"/>
+            <a:off x="3678859" y="4297680"/>
+            <a:ext cx="2014651" cy="1325880"/>
           </a:xfrm>
           <a:prstGeom prst="rect">
             <a:avLst/>
@@ -3926,54 +3996,13 @@
           </a:bodyPr>
           <a:lstStyle/>
           <a:p>
-            <a:pPr algn="l">
+            <a:pPr algn="ctr">
               <a:lnSpc>
-                <a:spcPct val="110000"/>
+                <a:spcPct val="145000"/>
               </a:lnSpc>
             </a:pPr>
             <a:r>
-              <a:rPr sz="1600" b="1">
-                <a:solidFill>
-                  <a:srgbClr val="1C2A33"/>
-                </a:solidFill>
-                <a:latin typeface="微软雅黑"/>
-                <a:ea typeface="微软雅黑"/>
-                <a:cs typeface="微软雅黑"/>
-              </a:rPr>
-              <a:t>目标</a:t>
-            </a:r>
-          </a:p>
-        </p:txBody>
-      </p:sp>
-      <p:sp>
-        <p:nvSpPr>
-          <p:cNvPr id="14" name="TextBox 13"/>
-          <p:cNvSpPr txBox="1"/>
-          <p:nvPr/>
-        </p:nvSpPr>
-        <p:spPr>
-          <a:xfrm>
-            <a:off x="6995160" y="1965960"/>
-            <a:ext cx="4434840" cy="1417320"/>
-          </a:xfrm>
-          <a:prstGeom prst="rect">
-            <a:avLst/>
-          </a:prstGeom>
-          <a:noFill/>
-        </p:spPr>
-        <p:txBody>
-          <a:bodyPr wrap="square" anchor="t" lIns="0" rIns="0" tIns="0" bIns="0">
-            <a:spAutoFit/>
-          </a:bodyPr>
-          <a:lstStyle/>
-          <a:p>
-            <a:pPr algn="l">
-              <a:lnSpc>
-                <a:spcPct val="128000"/>
-              </a:lnSpc>
-            </a:pPr>
-            <a:r>
-              <a:rPr sz="1400" b="0">
+              <a:rPr sz="1300" b="0">
                 <a:solidFill>
                   <a:srgbClr val="1C2A33"/>
                 </a:solidFill>
@@ -3981,21 +4010,21 @@
                 <a:ea typeface="楷体"/>
                 <a:cs typeface="楷体"/>
               </a:rPr>
-              <a:t>文化意识：体会科学精神的不同呈现方式（团队谦逊vs个人志趣）。</a:t>
-            </a:r>
-          </a:p>
-        </p:txBody>
-      </p:sp>
-      <p:sp>
-        <p:nvSpPr>
-          <p:cNvPr id="15" name="Rounded Rectangle 14"/>
+              <a:t>体会科学精神的不同呈现方式（团队谦逊vs个人志趣）。</a:t>
+            </a:r>
+          </a:p>
+        </p:txBody>
+      </p:sp>
+      <p:sp>
+        <p:nvSpPr>
+          <p:cNvPr id="16" name="Rounded Rectangle 15"/>
           <p:cNvSpPr/>
           <p:nvPr/>
         </p:nvSpPr>
         <p:spPr>
           <a:xfrm>
-            <a:off x="640080" y="3703320"/>
-            <a:ext cx="5349240" cy="2057400"/>
+            <a:off x="6278727" y="2377440"/>
+            <a:ext cx="2453563" cy="3383280"/>
           </a:xfrm>
           <a:prstGeom prst="roundRect">
             <a:avLst/>
@@ -4003,7 +4032,7 @@
           <a:solidFill>
             <a:srgbClr val="FFFFFF"/>
           </a:solidFill>
-          <a:ln w="22860">
+          <a:ln w="20320">
             <a:solidFill>
               <a:srgbClr val="B23A2A"/>
             </a:solidFill>
@@ -4034,14 +4063,14 @@
       </p:sp>
       <p:sp>
         <p:nvSpPr>
-          <p:cNvPr id="16" name="Oval 15"/>
+          <p:cNvPr id="17" name="Oval 16"/>
           <p:cNvSpPr/>
           <p:nvPr/>
         </p:nvSpPr>
         <p:spPr>
           <a:xfrm>
-            <a:off x="804672" y="3867912"/>
-            <a:ext cx="457200" cy="457200"/>
+            <a:off x="7121461" y="2670048"/>
+            <a:ext cx="768096" cy="768096"/>
           </a:xfrm>
           <a:prstGeom prst="ellipse">
             <a:avLst/>
@@ -4078,14 +4107,14 @@
       </p:sp>
       <p:sp>
         <p:nvSpPr>
-          <p:cNvPr id="17" name="TextBox 16"/>
+          <p:cNvPr id="18" name="TextBox 17"/>
           <p:cNvSpPr txBox="1"/>
           <p:nvPr/>
         </p:nvSpPr>
         <p:spPr>
           <a:xfrm>
-            <a:off x="804672" y="3922776"/>
-            <a:ext cx="457200" cy="384048"/>
+            <a:off x="7121461" y="2834640"/>
+            <a:ext cx="768096" cy="457200"/>
           </a:xfrm>
           <a:prstGeom prst="rect">
             <a:avLst/>
@@ -4100,29 +4129,66 @@
           <a:p>
             <a:pPr algn="ctr"/>
             <a:r>
-              <a:rPr sz="1600" b="1">
+              <a:rPr sz="2200" b="1">
                 <a:solidFill>
                   <a:srgbClr val="FFFFFF"/>
+                </a:solidFill>
+                <a:latin typeface="楷体"/>
+                <a:ea typeface="楷体"/>
+                <a:cs typeface="楷体"/>
+              </a:rPr>
+              <a:t>3</a:t>
+            </a:r>
+          </a:p>
+        </p:txBody>
+      </p:sp>
+      <p:sp>
+        <p:nvSpPr>
+          <p:cNvPr id="19" name="TextBox 18"/>
+          <p:cNvSpPr txBox="1"/>
+          <p:nvPr/>
+        </p:nvSpPr>
+        <p:spPr>
+          <a:xfrm>
+            <a:off x="6461607" y="3703320"/>
+            <a:ext cx="2087803" cy="548640"/>
+          </a:xfrm>
+          <a:prstGeom prst="rect">
+            <a:avLst/>
+          </a:prstGeom>
+          <a:noFill/>
+        </p:spPr>
+        <p:txBody>
+          <a:bodyPr wrap="square" anchor="t" lIns="0" rIns="0" tIns="0" bIns="0">
+            <a:spAutoFit/>
+          </a:bodyPr>
+          <a:lstStyle/>
+          <a:p>
+            <a:pPr algn="ctr"/>
+            <a:r>
+              <a:rPr sz="1700" b="1">
+                <a:solidFill>
+                  <a:srgbClr val="B23A2A"/>
                 </a:solidFill>
                 <a:latin typeface="微软雅黑"/>
                 <a:ea typeface="微软雅黑"/>
                 <a:cs typeface="微软雅黑"/>
               </a:rPr>
-              <a:t>3</a:t>
-            </a:r>
-          </a:p>
-        </p:txBody>
-      </p:sp>
-      <p:sp>
-        <p:nvSpPr>
-          <p:cNvPr id="18" name="TextBox 17"/>
+              <a:t>思维品质</a:t>
+            </a:r>
+          </a:p>
+        </p:txBody>
+      </p:sp>
+      <p:sp>
+        <p:nvSpPr>
+          <p:cNvPr id="20" name="TextBox 19"/>
           <p:cNvSpPr txBox="1"/>
           <p:nvPr/>
         </p:nvSpPr>
         <p:spPr>
           <a:xfrm>
-            <a:off x="1371600" y="3813048"/>
-            <a:ext cx="4434840" cy="457200"/>
+            <a:off x="6498183" y="4297680"/>
+            <a:ext cx="2014651" cy="1325880"/>
           </a:xfrm>
           <a:prstGeom prst="rect">
             <a:avLst/>
@@ -4135,54 +4201,13 @@
           </a:bodyPr>
           <a:lstStyle/>
           <a:p>
-            <a:pPr algn="l">
+            <a:pPr algn="ctr">
               <a:lnSpc>
-                <a:spcPct val="110000"/>
+                <a:spcPct val="145000"/>
               </a:lnSpc>
             </a:pPr>
             <a:r>
-              <a:rPr sz="1600" b="1">
-                <a:solidFill>
-                  <a:srgbClr val="1C2A33"/>
-                </a:solidFill>
-                <a:latin typeface="微软雅黑"/>
-                <a:ea typeface="微软雅黑"/>
-                <a:cs typeface="微软雅黑"/>
-              </a:rPr>
-              <a:t>目标</a:t>
-            </a:r>
-          </a:p>
-        </p:txBody>
-      </p:sp>
-      <p:sp>
-        <p:nvSpPr>
-          <p:cNvPr id="19" name="TextBox 18"/>
-          <p:cNvSpPr txBox="1"/>
-          <p:nvPr/>
-        </p:nvSpPr>
-        <p:spPr>
-          <a:xfrm>
-            <a:off x="1371600" y="4251960"/>
-            <a:ext cx="4434840" cy="1417320"/>
-          </a:xfrm>
-          <a:prstGeom prst="rect">
-            <a:avLst/>
-          </a:prstGeom>
-          <a:noFill/>
-        </p:spPr>
-        <p:txBody>
-          <a:bodyPr wrap="square" anchor="t" lIns="0" rIns="0" tIns="0" bIns="0">
-            <a:spAutoFit/>
-          </a:bodyPr>
-          <a:lstStyle/>
-          <a:p>
-            <a:pPr algn="l">
-              <a:lnSpc>
-                <a:spcPct val="128000"/>
-              </a:lnSpc>
-            </a:pPr>
-            <a:r>
-              <a:rPr sz="1400" b="0">
+              <a:rPr sz="1300" b="0">
                 <a:solidFill>
                   <a:srgbClr val="1C2A33"/>
                 </a:solidFill>
@@ -4190,21 +4215,21 @@
                 <a:ea typeface="楷体"/>
                 <a:cs typeface="楷体"/>
               </a:rPr>
-              <a:t>思维品质：通过比较培养同中求异、提炼范式思维。</a:t>
-            </a:r>
-          </a:p>
-        </p:txBody>
-      </p:sp>
-      <p:sp>
-        <p:nvSpPr>
-          <p:cNvPr id="20" name="Rounded Rectangle 19"/>
+              <a:t>通过比较培养同中求异、提炼范式思维。</a:t>
+            </a:r>
+          </a:p>
+        </p:txBody>
+      </p:sp>
+      <p:sp>
+        <p:nvSpPr>
+          <p:cNvPr id="21" name="Rounded Rectangle 20"/>
           <p:cNvSpPr/>
           <p:nvPr/>
         </p:nvSpPr>
         <p:spPr>
           <a:xfrm>
-            <a:off x="6263640" y="3703320"/>
-            <a:ext cx="5349240" cy="2057400"/>
+            <a:off x="9098051" y="2377440"/>
+            <a:ext cx="2453563" cy="3383280"/>
           </a:xfrm>
           <a:prstGeom prst="roundRect">
             <a:avLst/>
@@ -4212,7 +4237,7 @@
           <a:solidFill>
             <a:srgbClr val="FFFFFF"/>
           </a:solidFill>
-          <a:ln w="22860">
+          <a:ln w="20320">
             <a:solidFill>
               <a:srgbClr val="B23A2A"/>
             </a:solidFill>
@@ -4243,14 +4268,14 @@
       </p:sp>
       <p:sp>
         <p:nvSpPr>
-          <p:cNvPr id="21" name="Oval 20"/>
+          <p:cNvPr id="22" name="Oval 21"/>
           <p:cNvSpPr/>
           <p:nvPr/>
         </p:nvSpPr>
         <p:spPr>
           <a:xfrm>
-            <a:off x="6428232" y="3867912"/>
-            <a:ext cx="457200" cy="457200"/>
+            <a:off x="9940785" y="2670048"/>
+            <a:ext cx="768096" cy="768096"/>
           </a:xfrm>
           <a:prstGeom prst="ellipse">
             <a:avLst/>
@@ -4287,14 +4312,14 @@
       </p:sp>
       <p:sp>
         <p:nvSpPr>
-          <p:cNvPr id="22" name="TextBox 21"/>
+          <p:cNvPr id="23" name="TextBox 22"/>
           <p:cNvSpPr txBox="1"/>
           <p:nvPr/>
         </p:nvSpPr>
         <p:spPr>
           <a:xfrm>
-            <a:off x="6428232" y="3922776"/>
-            <a:ext cx="457200" cy="384048"/>
+            <a:off x="9940785" y="2834640"/>
+            <a:ext cx="768096" cy="457200"/>
           </a:xfrm>
           <a:prstGeom prst="rect">
             <a:avLst/>
@@ -4309,29 +4334,66 @@
           <a:p>
             <a:pPr algn="ctr"/>
             <a:r>
-              <a:rPr sz="1600" b="1">
+              <a:rPr sz="2200" b="1">
                 <a:solidFill>
                   <a:srgbClr val="FFFFFF"/>
+                </a:solidFill>
+                <a:latin typeface="楷体"/>
+                <a:ea typeface="楷体"/>
+                <a:cs typeface="楷体"/>
+              </a:rPr>
+              <a:t>4</a:t>
+            </a:r>
+          </a:p>
+        </p:txBody>
+      </p:sp>
+      <p:sp>
+        <p:nvSpPr>
+          <p:cNvPr id="24" name="TextBox 23"/>
+          <p:cNvSpPr txBox="1"/>
+          <p:nvPr/>
+        </p:nvSpPr>
+        <p:spPr>
+          <a:xfrm>
+            <a:off x="9280931" y="3703320"/>
+            <a:ext cx="2087803" cy="548640"/>
+          </a:xfrm>
+          <a:prstGeom prst="rect">
+            <a:avLst/>
+          </a:prstGeom>
+          <a:noFill/>
+        </p:spPr>
+        <p:txBody>
+          <a:bodyPr wrap="square" anchor="t" lIns="0" rIns="0" tIns="0" bIns="0">
+            <a:spAutoFit/>
+          </a:bodyPr>
+          <a:lstStyle/>
+          <a:p>
+            <a:pPr algn="ctr"/>
+            <a:r>
+              <a:rPr sz="1700" b="1">
+                <a:solidFill>
+                  <a:srgbClr val="B23A2A"/>
                 </a:solidFill>
                 <a:latin typeface="微软雅黑"/>
                 <a:ea typeface="微软雅黑"/>
                 <a:cs typeface="微软雅黑"/>
               </a:rPr>
-              <a:t>4</a:t>
-            </a:r>
-          </a:p>
-        </p:txBody>
-      </p:sp>
-      <p:sp>
-        <p:nvSpPr>
-          <p:cNvPr id="23" name="TextBox 22"/>
+              <a:t>学习能力</a:t>
+            </a:r>
+          </a:p>
+        </p:txBody>
+      </p:sp>
+      <p:sp>
+        <p:nvSpPr>
+          <p:cNvPr id="25" name="TextBox 24"/>
           <p:cNvSpPr txBox="1"/>
           <p:nvPr/>
         </p:nvSpPr>
         <p:spPr>
           <a:xfrm>
-            <a:off x="6995160" y="3813048"/>
-            <a:ext cx="4434840" cy="457200"/>
+            <a:off x="9317507" y="4297680"/>
+            <a:ext cx="2014651" cy="1325880"/>
           </a:xfrm>
           <a:prstGeom prst="rect">
             <a:avLst/>
@@ -4344,54 +4406,13 @@
           </a:bodyPr>
           <a:lstStyle/>
           <a:p>
-            <a:pPr algn="l">
+            <a:pPr algn="ctr">
               <a:lnSpc>
-                <a:spcPct val="110000"/>
+                <a:spcPct val="145000"/>
               </a:lnSpc>
             </a:pPr>
             <a:r>
-              <a:rPr sz="1600" b="1">
-                <a:solidFill>
-                  <a:srgbClr val="1C2A33"/>
-                </a:solidFill>
-                <a:latin typeface="微软雅黑"/>
-                <a:ea typeface="微软雅黑"/>
-                <a:cs typeface="微软雅黑"/>
-              </a:rPr>
-              <a:t>目标</a:t>
-            </a:r>
-          </a:p>
-        </p:txBody>
-      </p:sp>
-      <p:sp>
-        <p:nvSpPr>
-          <p:cNvPr id="24" name="TextBox 23"/>
-          <p:cNvSpPr txBox="1"/>
-          <p:nvPr/>
-        </p:nvSpPr>
-        <p:spPr>
-          <a:xfrm>
-            <a:off x="6995160" y="4251960"/>
-            <a:ext cx="4434840" cy="1417320"/>
-          </a:xfrm>
-          <a:prstGeom prst="rect">
-            <a:avLst/>
-          </a:prstGeom>
-          <a:noFill/>
-        </p:spPr>
-        <p:txBody>
-          <a:bodyPr wrap="square" anchor="t" lIns="0" rIns="0" tIns="0" bIns="0">
-            <a:spAutoFit/>
-          </a:bodyPr>
-          <a:lstStyle/>
-          <a:p>
-            <a:pPr algn="l">
-              <a:lnSpc>
-                <a:spcPct val="128000"/>
-              </a:lnSpc>
-            </a:pPr>
-            <a:r>
-              <a:rPr sz="1400" b="0">
+              <a:rPr sz="1300" b="0">
                 <a:solidFill>
                   <a:srgbClr val="1C2A33"/>
                 </a:solidFill>
@@ -4399,14 +4420,14 @@
                 <a:ea typeface="楷体"/>
                 <a:cs typeface="楷体"/>
               </a:rPr>
-              <a:t>学习能力：掌握知识性读物群文双栏比较法。</a:t>
-            </a:r>
-          </a:p>
-        </p:txBody>
-      </p:sp>
-      <p:sp>
-        <p:nvSpPr>
-          <p:cNvPr id="25" name="TextBox 24"/>
+              <a:t>掌握知识性读物群文双栏比较法。</a:t>
+            </a:r>
+          </a:p>
+        </p:txBody>
+      </p:sp>
+      <p:sp>
+        <p:nvSpPr>
+          <p:cNvPr id="26" name="TextBox 25"/>
           <p:cNvSpPr txBox="1"/>
           <p:nvPr/>
         </p:nvSpPr>
@@ -4533,13 +4554,13 @@
             <a:r>
               <a:rPr sz="1300" b="1">
                 <a:solidFill>
-                  <a:srgbClr val="2E7D6B"/>
+                  <a:srgbClr val="B23A2A"/>
                 </a:solidFill>
                 <a:latin typeface="微软雅黑"/>
                 <a:ea typeface="微软雅黑"/>
                 <a:cs typeface="微软雅黑"/>
               </a:rPr>
-              <a:t>课文背景</a:t>
+              <a:t>背景与权威调研</a:t>
             </a:r>
           </a:p>
         </p:txBody>
@@ -4559,7 +4580,7 @@
             <a:avLst/>
           </a:prstGeom>
           <a:solidFill>
-            <a:srgbClr val="2E7D6B"/>
+            <a:srgbClr val="B23A2A"/>
           </a:solidFill>
           <a:ln>
             <a:noFill/>
@@ -4596,8 +4617,8 @@
         </p:nvSpPr>
         <p:spPr>
           <a:xfrm>
-            <a:off x="640080" y="1508760"/>
-            <a:ext cx="6766560" cy="4572000"/>
+            <a:off x="640080" y="1783080"/>
+            <a:ext cx="5227167" cy="4297680"/>
           </a:xfrm>
           <a:prstGeom prst="rect">
             <a:avLst/>
@@ -4615,11 +4636,11 @@
                 <a:spcPct val="150000"/>
               </a:lnSpc>
               <a:spcAft>
-                <a:spcPts val="600"/>
+                <a:spcPts val="800"/>
               </a:spcAft>
             </a:pPr>
             <a:r>
-              <a:rPr sz="1600" b="0">
+              <a:rPr sz="1450" b="0">
                 <a:solidFill>
                   <a:srgbClr val="1C2A33"/>
                 </a:solidFill>
@@ -4632,31 +4653,47 @@
           </a:p>
         </p:txBody>
       </p:sp>
-      <p:pic>
-        <p:nvPicPr>
-          <p:cNvPr id="6" name="Picture 5" descr="typewriter.jpg"/>
-          <p:cNvPicPr>
-            <a:picLocks noChangeAspect="1"/>
-          </p:cNvPicPr>
-          <p:nvPr/>
-        </p:nvPicPr>
-        <p:blipFill>
-          <a:blip r:embed="rId2"/>
-          <a:srcRect l="5860" r="5860"/>
-          <a:stretch>
-            <a:fillRect/>
-          </a:stretch>
-        </p:blipFill>
-        <p:spPr>
-          <a:xfrm>
-            <a:off x="8046720" y="1508760"/>
-            <a:ext cx="4114800" cy="3108960"/>
-          </a:xfrm>
-          <a:prstGeom prst="rect">
-            <a:avLst/>
-          </a:prstGeom>
-        </p:spPr>
-      </p:pic>
+      <p:sp>
+        <p:nvSpPr>
+          <p:cNvPr id="6" name="Rounded Rectangle 5"/>
+          <p:cNvSpPr/>
+          <p:nvPr/>
+        </p:nvSpPr>
+        <p:spPr>
+          <a:xfrm>
+            <a:off x="6324447" y="1783080"/>
+            <a:ext cx="5227167" cy="4297680"/>
+          </a:xfrm>
+          <a:prstGeom prst="roundRect">
+            <a:avLst/>
+          </a:prstGeom>
+          <a:solidFill>
+            <a:srgbClr val="1C2A33"/>
+          </a:solidFill>
+          <a:effectLst/>
+        </p:spPr>
+        <p:style>
+          <a:lnRef idx="1">
+            <a:schemeClr val="accent1"/>
+          </a:lnRef>
+          <a:fillRef idx="3">
+            <a:schemeClr val="accent1"/>
+          </a:fillRef>
+          <a:effectRef idx="2">
+            <a:schemeClr val="accent1"/>
+          </a:effectRef>
+          <a:fontRef idx="minor">
+            <a:schemeClr val="lt1"/>
+          </a:fontRef>
+        </p:style>
+        <p:txBody>
+          <a:bodyPr rtlCol="0" anchor="ctr"/>
+          <a:lstStyle/>
+          <a:p>
+            <a:pPr algn="ctr"/>
+          </a:p>
+        </p:txBody>
+      </p:sp>
       <p:sp>
         <p:nvSpPr>
           <p:cNvPr id="7" name="TextBox 6"/>
@@ -4665,8 +4702,8 @@
         </p:nvSpPr>
         <p:spPr>
           <a:xfrm>
-            <a:off x="8046720" y="4663440"/>
-            <a:ext cx="4114800" cy="365760"/>
+            <a:off x="6598767" y="1965960"/>
+            <a:ext cx="4678527" cy="457200"/>
           </a:xfrm>
           <a:prstGeom prst="rect">
             <a:avLst/>
@@ -4679,24 +4716,110 @@
           </a:bodyPr>
           <a:lstStyle/>
           <a:p>
-            <a:pPr algn="ctr"/>
-            <a:r>
-              <a:rPr sz="1100" b="0">
-                <a:solidFill>
-                  <a:srgbClr val="6B6258"/>
+            <a:pPr algn="l"/>
+            <a:r>
+              <a:rPr sz="1600" b="1">
+                <a:solidFill>
+                  <a:srgbClr val="C8A86B"/>
+                </a:solidFill>
+                <a:latin typeface="楷体"/>
+                <a:ea typeface="楷体"/>
+                <a:cs typeface="楷体"/>
+              </a:rPr>
+              <a:t>权威来源</a:t>
+            </a:r>
+          </a:p>
+        </p:txBody>
+      </p:sp>
+      <p:sp>
+        <p:nvSpPr>
+          <p:cNvPr id="8" name="TextBox 7"/>
+          <p:cNvSpPr txBox="1"/>
+          <p:nvPr/>
+        </p:nvSpPr>
+        <p:spPr>
+          <a:xfrm>
+            <a:off x="6598767" y="2514599"/>
+            <a:ext cx="4678527" cy="3383280"/>
+          </a:xfrm>
+          <a:prstGeom prst="rect">
+            <a:avLst/>
+          </a:prstGeom>
+          <a:noFill/>
+        </p:spPr>
+        <p:txBody>
+          <a:bodyPr wrap="square" anchor="t" lIns="0" rIns="0" tIns="0" bIns="0">
+            <a:spAutoFit/>
+          </a:bodyPr>
+          <a:lstStyle/>
+          <a:p>
+            <a:pPr algn="l">
+              <a:lnSpc>
+                <a:spcPct val="145000"/>
+              </a:lnSpc>
+              <a:spcAft>
+                <a:spcPts val="800"/>
+              </a:spcAft>
+            </a:pPr>
+            <a:r>
+              <a:rPr sz="1250" b="0">
+                <a:solidFill>
+                  <a:srgbClr val="FFFFFF"/>
+                </a:solidFill>
+                <a:latin typeface="楷体"/>
+                <a:ea typeface="楷体"/>
+                <a:cs typeface="楷体"/>
+              </a:rPr>
+              <a:t>· 来源：人民网 / 科技部（屠呦呦 2015 诺贝尔生理学或医学奖）</a:t>
+            </a:r>
+          </a:p>
+          <a:p>
+            <a:pPr algn="l">
+              <a:lnSpc>
+                <a:spcPct val="145000"/>
+              </a:lnSpc>
+              <a:spcAft>
+                <a:spcPts val="800"/>
+              </a:spcAft>
+            </a:pPr>
+            <a:r>
+              <a:rPr sz="1250" b="0">
+                <a:solidFill>
+                  <a:srgbClr val="FFFFFF"/>
+                </a:solidFill>
+                <a:latin typeface="楷体"/>
+                <a:ea typeface="楷体"/>
+                <a:cs typeface="楷体"/>
+              </a:rPr>
+              <a:t>· 来源：统编教材用书 必修下第三单元（屠呦呦与加来道雄群文）</a:t>
+            </a:r>
+          </a:p>
+          <a:p>
+            <a:pPr algn="l">
+              <a:lnSpc>
+                <a:spcPct val="140000"/>
+              </a:lnSpc>
+              <a:spcBef>
+                <a:spcPts val="600"/>
+              </a:spcBef>
+            </a:pPr>
+            <a:r>
+              <a:rPr sz="1150" b="0">
+                <a:solidFill>
+                  <a:srgbClr val="E7DFD2"/>
                 </a:solidFill>
                 <a:latin typeface="微软雅黑"/>
                 <a:ea typeface="微软雅黑"/>
                 <a:cs typeface="微软雅黑"/>
               </a:rPr>
-              <a:t>资料图（自由授权，复用 typewriter.jpg）</a:t>
-            </a:r>
-          </a:p>
-        </p:txBody>
-      </p:sp>
-      <p:sp>
-        <p:nvSpPr>
-          <p:cNvPr id="8" name="TextBox 7"/>
+              <a:t>本课件未使用无关配图（学科色块兜底）</a:t>
+            </a:r>
+          </a:p>
+        </p:txBody>
+      </p:sp>
+      <p:sp>
+        <p:nvSpPr>
+          <p:cNvPr id="9" name="TextBox 8"/>
           <p:cNvSpPr txBox="1"/>
           <p:nvPr/>
         </p:nvSpPr>
@@ -4751,51 +4874,7 @@
       <p:grpSpPr/>
       <p:sp>
         <p:nvSpPr>
-          <p:cNvPr id="2" name="Rectangle 1"/>
-          <p:cNvSpPr/>
-          <p:nvPr/>
-        </p:nvSpPr>
-        <p:spPr>
-          <a:xfrm>
-            <a:off x="0" y="0"/>
-            <a:ext cx="12191695" cy="6858000"/>
-          </a:xfrm>
-          <a:prstGeom prst="rect">
-            <a:avLst/>
-          </a:prstGeom>
-          <a:solidFill>
-            <a:srgbClr val="F4EFE6"/>
-          </a:solidFill>
-          <a:ln>
-            <a:noFill/>
-          </a:ln>
-          <a:effectLst/>
-        </p:spPr>
-        <p:style>
-          <a:lnRef idx="1">
-            <a:schemeClr val="accent1"/>
-          </a:lnRef>
-          <a:fillRef idx="3">
-            <a:schemeClr val="accent1"/>
-          </a:fillRef>
-          <a:effectRef idx="2">
-            <a:schemeClr val="accent1"/>
-          </a:effectRef>
-          <a:fontRef idx="minor">
-            <a:schemeClr val="lt1"/>
-          </a:fontRef>
-        </p:style>
-        <p:txBody>
-          <a:bodyPr rtlCol="0" anchor="ctr"/>
-          <a:lstStyle/>
-          <a:p>
-            <a:pPr algn="ctr"/>
-          </a:p>
-        </p:txBody>
-      </p:sp>
-      <p:sp>
-        <p:nvSpPr>
-          <p:cNvPr id="3" name="TextBox 2"/>
+          <p:cNvPr id="2" name="TextBox 1"/>
           <p:cNvSpPr txBox="1"/>
           <p:nvPr/>
         </p:nvSpPr>
@@ -4829,14 +4908,14 @@
                 <a:ea typeface="微软雅黑"/>
                 <a:cs typeface="微软雅黑"/>
               </a:rPr>
-              <a:t>学习重点</a:t>
-            </a:r>
-          </a:p>
-        </p:txBody>
-      </p:sp>
-      <p:sp>
-        <p:nvSpPr>
-          <p:cNvPr id="4" name="Rectangle 3"/>
+              <a:t>重点</a:t>
+            </a:r>
+          </a:p>
+        </p:txBody>
+      </p:sp>
+      <p:sp>
+        <p:nvSpPr>
+          <p:cNvPr id="3" name="Rectangle 2"/>
           <p:cNvSpPr/>
           <p:nvPr/>
         </p:nvSpPr>
@@ -4880,14 +4959,51 @@
       </p:sp>
       <p:sp>
         <p:nvSpPr>
+          <p:cNvPr id="4" name="TextBox 3"/>
+          <p:cNvSpPr txBox="1"/>
+          <p:nvPr/>
+        </p:nvSpPr>
+        <p:spPr>
+          <a:xfrm>
+            <a:off x="640080" y="1325880"/>
+            <a:ext cx="10515600" cy="548640"/>
+          </a:xfrm>
+          <a:prstGeom prst="rect">
+            <a:avLst/>
+          </a:prstGeom>
+          <a:noFill/>
+        </p:spPr>
+        <p:txBody>
+          <a:bodyPr wrap="square" anchor="t" lIns="0" rIns="0" tIns="0" bIns="0">
+            <a:spAutoFit/>
+          </a:bodyPr>
+          <a:lstStyle/>
+          <a:p>
+            <a:pPr algn="l"/>
+            <a:r>
+              <a:rPr sz="2600" b="1">
+                <a:solidFill>
+                  <a:srgbClr val="1C2A33"/>
+                </a:solidFill>
+                <a:latin typeface="楷体"/>
+                <a:ea typeface="楷体"/>
+                <a:cs typeface="楷体"/>
+              </a:rPr>
+              <a:t>重点</a:t>
+            </a:r>
+          </a:p>
+        </p:txBody>
+      </p:sp>
+      <p:sp>
+        <p:nvSpPr>
           <p:cNvPr id="5" name="Rounded Rectangle 4"/>
           <p:cNvSpPr/>
           <p:nvPr/>
         </p:nvSpPr>
         <p:spPr>
           <a:xfrm>
-            <a:off x="640080" y="1371600"/>
-            <a:ext cx="10911535" cy="1597152"/>
+            <a:off x="640080" y="2194560"/>
+            <a:ext cx="3393338" cy="3931920"/>
           </a:xfrm>
           <a:prstGeom prst="roundRect">
             <a:avLst/>
@@ -4895,7 +5011,343 @@
           <a:solidFill>
             <a:srgbClr val="FFFFFF"/>
           </a:solidFill>
-          <a:ln w="22860">
+          <a:ln w="20320">
+            <a:solidFill>
+              <a:srgbClr val="B23A2A"/>
+            </a:solidFill>
+          </a:ln>
+          <a:effectLst/>
+        </p:spPr>
+        <p:style>
+          <a:lnRef idx="1">
+            <a:schemeClr val="accent1"/>
+          </a:lnRef>
+          <a:fillRef idx="3">
+            <a:schemeClr val="accent1"/>
+          </a:fillRef>
+          <a:effectRef idx="2">
+            <a:schemeClr val="accent1"/>
+          </a:effectRef>
+          <a:fontRef idx="minor">
+            <a:schemeClr val="lt1"/>
+          </a:fontRef>
+        </p:style>
+        <p:txBody>
+          <a:bodyPr rtlCol="0" anchor="ctr"/>
+          <a:lstStyle/>
+          <a:p>
+            <a:pPr algn="ctr"/>
+          </a:p>
+        </p:txBody>
+      </p:sp>
+      <p:sp>
+        <p:nvSpPr>
+          <p:cNvPr id="6" name="Oval 5"/>
+          <p:cNvSpPr/>
+          <p:nvPr/>
+        </p:nvSpPr>
+        <p:spPr>
+          <a:xfrm>
+            <a:off x="868680" y="2450592"/>
+            <a:ext cx="548640" cy="548640"/>
+          </a:xfrm>
+          <a:prstGeom prst="ellipse">
+            <a:avLst/>
+          </a:prstGeom>
+          <a:solidFill>
+            <a:srgbClr val="B23A2A"/>
+          </a:solidFill>
+          <a:ln>
+            <a:noFill/>
+          </a:ln>
+          <a:effectLst/>
+        </p:spPr>
+        <p:style>
+          <a:lnRef idx="1">
+            <a:schemeClr val="accent1"/>
+          </a:lnRef>
+          <a:fillRef idx="3">
+            <a:schemeClr val="accent1"/>
+          </a:fillRef>
+          <a:effectRef idx="2">
+            <a:schemeClr val="accent1"/>
+          </a:effectRef>
+          <a:fontRef idx="minor">
+            <a:schemeClr val="lt1"/>
+          </a:fontRef>
+        </p:style>
+        <p:txBody>
+          <a:bodyPr rtlCol="0" anchor="ctr"/>
+          <a:lstStyle/>
+          <a:p>
+            <a:pPr algn="ctr"/>
+          </a:p>
+        </p:txBody>
+      </p:sp>
+      <p:sp>
+        <p:nvSpPr>
+          <p:cNvPr id="7" name="TextBox 6"/>
+          <p:cNvSpPr txBox="1"/>
+          <p:nvPr/>
+        </p:nvSpPr>
+        <p:spPr>
+          <a:xfrm>
+            <a:off x="868680" y="2514600"/>
+            <a:ext cx="548640" cy="411480"/>
+          </a:xfrm>
+          <a:prstGeom prst="rect">
+            <a:avLst/>
+          </a:prstGeom>
+          <a:noFill/>
+        </p:spPr>
+        <p:txBody>
+          <a:bodyPr wrap="square" anchor="t" lIns="0" rIns="0" tIns="0" bIns="0">
+            <a:spAutoFit/>
+          </a:bodyPr>
+          <a:lstStyle/>
+          <a:p>
+            <a:pPr algn="ctr"/>
+            <a:r>
+              <a:rPr sz="2000" b="1">
+                <a:solidFill>
+                  <a:srgbClr val="FFFFFF"/>
+                </a:solidFill>
+                <a:latin typeface="微软雅黑"/>
+                <a:ea typeface="微软雅黑"/>
+                <a:cs typeface="微软雅黑"/>
+              </a:rPr>
+              <a:t>1</a:t>
+            </a:r>
+          </a:p>
+        </p:txBody>
+      </p:sp>
+      <p:sp>
+        <p:nvSpPr>
+          <p:cNvPr id="8" name="TextBox 7"/>
+          <p:cNvSpPr txBox="1"/>
+          <p:nvPr/>
+        </p:nvSpPr>
+        <p:spPr>
+          <a:xfrm>
+            <a:off x="1554480" y="2468880"/>
+            <a:ext cx="2296058" cy="777240"/>
+          </a:xfrm>
+          <a:prstGeom prst="rect">
+            <a:avLst/>
+          </a:prstGeom>
+          <a:noFill/>
+        </p:spPr>
+        <p:txBody>
+          <a:bodyPr wrap="square" anchor="t" lIns="0" rIns="0" tIns="0" bIns="0">
+            <a:spAutoFit/>
+          </a:bodyPr>
+          <a:lstStyle/>
+          <a:p>
+            <a:pPr algn="l">
+              <a:lnSpc>
+                <a:spcPct val="135000"/>
+              </a:lnSpc>
+            </a:pPr>
+            <a:r>
+              <a:rPr sz="1450" b="1">
+                <a:solidFill>
+                  <a:srgbClr val="1C2A33"/>
+                </a:solidFill>
+                <a:latin typeface="楷体"/>
+                <a:ea typeface="楷体"/>
+                <a:cs typeface="楷体"/>
+              </a:rPr>
+              <a:t>① 青蒿素：第三人称+发现过程+准确平实+团队谦逊。</a:t>
+            </a:r>
+          </a:p>
+        </p:txBody>
+      </p:sp>
+      <p:sp>
+        <p:nvSpPr>
+          <p:cNvPr id="9" name="Rounded Rectangle 8"/>
+          <p:cNvSpPr/>
+          <p:nvPr/>
+        </p:nvSpPr>
+        <p:spPr>
+          <a:xfrm>
+            <a:off x="4399178" y="2194560"/>
+            <a:ext cx="3393338" cy="3931920"/>
+          </a:xfrm>
+          <a:prstGeom prst="roundRect">
+            <a:avLst/>
+          </a:prstGeom>
+          <a:solidFill>
+            <a:srgbClr val="FFFFFF"/>
+          </a:solidFill>
+          <a:ln w="20320">
+            <a:solidFill>
+              <a:srgbClr val="2E7D6B"/>
+            </a:solidFill>
+          </a:ln>
+          <a:effectLst/>
+        </p:spPr>
+        <p:style>
+          <a:lnRef idx="1">
+            <a:schemeClr val="accent1"/>
+          </a:lnRef>
+          <a:fillRef idx="3">
+            <a:schemeClr val="accent1"/>
+          </a:fillRef>
+          <a:effectRef idx="2">
+            <a:schemeClr val="accent1"/>
+          </a:effectRef>
+          <a:fontRef idx="minor">
+            <a:schemeClr val="lt1"/>
+          </a:fontRef>
+        </p:style>
+        <p:txBody>
+          <a:bodyPr rtlCol="0" anchor="ctr"/>
+          <a:lstStyle/>
+          <a:p>
+            <a:pPr algn="ctr"/>
+          </a:p>
+        </p:txBody>
+      </p:sp>
+      <p:sp>
+        <p:nvSpPr>
+          <p:cNvPr id="10" name="Oval 9"/>
+          <p:cNvSpPr/>
+          <p:nvPr/>
+        </p:nvSpPr>
+        <p:spPr>
+          <a:xfrm>
+            <a:off x="4627778" y="2450592"/>
+            <a:ext cx="548640" cy="548640"/>
+          </a:xfrm>
+          <a:prstGeom prst="ellipse">
+            <a:avLst/>
+          </a:prstGeom>
+          <a:solidFill>
+            <a:srgbClr val="2E7D6B"/>
+          </a:solidFill>
+          <a:ln>
+            <a:noFill/>
+          </a:ln>
+          <a:effectLst/>
+        </p:spPr>
+        <p:style>
+          <a:lnRef idx="1">
+            <a:schemeClr val="accent1"/>
+          </a:lnRef>
+          <a:fillRef idx="3">
+            <a:schemeClr val="accent1"/>
+          </a:fillRef>
+          <a:effectRef idx="2">
+            <a:schemeClr val="accent1"/>
+          </a:effectRef>
+          <a:fontRef idx="minor">
+            <a:schemeClr val="lt1"/>
+          </a:fontRef>
+        </p:style>
+        <p:txBody>
+          <a:bodyPr rtlCol="0" anchor="ctr"/>
+          <a:lstStyle/>
+          <a:p>
+            <a:pPr algn="ctr"/>
+          </a:p>
+        </p:txBody>
+      </p:sp>
+      <p:sp>
+        <p:nvSpPr>
+          <p:cNvPr id="11" name="TextBox 10"/>
+          <p:cNvSpPr txBox="1"/>
+          <p:nvPr/>
+        </p:nvSpPr>
+        <p:spPr>
+          <a:xfrm>
+            <a:off x="4627778" y="2514600"/>
+            <a:ext cx="548640" cy="411480"/>
+          </a:xfrm>
+          <a:prstGeom prst="rect">
+            <a:avLst/>
+          </a:prstGeom>
+          <a:noFill/>
+        </p:spPr>
+        <p:txBody>
+          <a:bodyPr wrap="square" anchor="t" lIns="0" rIns="0" tIns="0" bIns="0">
+            <a:spAutoFit/>
+          </a:bodyPr>
+          <a:lstStyle/>
+          <a:p>
+            <a:pPr algn="ctr"/>
+            <a:r>
+              <a:rPr sz="2000" b="1">
+                <a:solidFill>
+                  <a:srgbClr val="FFFFFF"/>
+                </a:solidFill>
+                <a:latin typeface="微软雅黑"/>
+                <a:ea typeface="微软雅黑"/>
+                <a:cs typeface="微软雅黑"/>
+              </a:rPr>
+              <a:t>2</a:t>
+            </a:r>
+          </a:p>
+        </p:txBody>
+      </p:sp>
+      <p:sp>
+        <p:nvSpPr>
+          <p:cNvPr id="12" name="TextBox 11"/>
+          <p:cNvSpPr txBox="1"/>
+          <p:nvPr/>
+        </p:nvSpPr>
+        <p:spPr>
+          <a:xfrm>
+            <a:off x="5313578" y="2468880"/>
+            <a:ext cx="2296058" cy="777240"/>
+          </a:xfrm>
+          <a:prstGeom prst="rect">
+            <a:avLst/>
+          </a:prstGeom>
+          <a:noFill/>
+        </p:spPr>
+        <p:txBody>
+          <a:bodyPr wrap="square" anchor="t" lIns="0" rIns="0" tIns="0" bIns="0">
+            <a:spAutoFit/>
+          </a:bodyPr>
+          <a:lstStyle/>
+          <a:p>
+            <a:pPr algn="l">
+              <a:lnSpc>
+                <a:spcPct val="135000"/>
+              </a:lnSpc>
+            </a:pPr>
+            <a:r>
+              <a:rPr sz="1450" b="1">
+                <a:solidFill>
+                  <a:srgbClr val="1C2A33"/>
+                </a:solidFill>
+                <a:latin typeface="楷体"/>
+                <a:ea typeface="楷体"/>
+                <a:cs typeface="楷体"/>
+              </a:rPr>
+              <a:t>② 历程：第一人称+成长阶段+叙事说理+个人志趣。</a:t>
+            </a:r>
+          </a:p>
+        </p:txBody>
+      </p:sp>
+      <p:sp>
+        <p:nvSpPr>
+          <p:cNvPr id="13" name="Rounded Rectangle 12"/>
+          <p:cNvSpPr/>
+          <p:nvPr/>
+        </p:nvSpPr>
+        <p:spPr>
+          <a:xfrm>
+            <a:off x="8158276" y="2194560"/>
+            <a:ext cx="3393338" cy="3931920"/>
+          </a:xfrm>
+          <a:prstGeom prst="roundRect">
+            <a:avLst/>
+          </a:prstGeom>
+          <a:solidFill>
+            <a:srgbClr val="FFFFFF"/>
+          </a:solidFill>
+          <a:ln w="20320">
             <a:solidFill>
               <a:srgbClr val="C8A86B"/>
             </a:solidFill>
@@ -4926,107 +5378,23 @@
       </p:sp>
       <p:sp>
         <p:nvSpPr>
-          <p:cNvPr id="6" name="TextBox 5"/>
-          <p:cNvSpPr txBox="1"/>
-          <p:nvPr/>
-        </p:nvSpPr>
-        <p:spPr>
-          <a:xfrm>
-            <a:off x="1371600" y="1481328"/>
-            <a:ext cx="9997135" cy="457200"/>
-          </a:xfrm>
-          <a:prstGeom prst="rect">
-            <a:avLst/>
-          </a:prstGeom>
-          <a:noFill/>
-        </p:spPr>
-        <p:txBody>
-          <a:bodyPr wrap="square" anchor="t" lIns="0" rIns="0" tIns="0" bIns="0">
-            <a:spAutoFit/>
-          </a:bodyPr>
-          <a:lstStyle/>
-          <a:p>
-            <a:pPr algn="l">
-              <a:lnSpc>
-                <a:spcPct val="110000"/>
-              </a:lnSpc>
-            </a:pPr>
-            <a:r>
-              <a:rPr sz="1600" b="1">
-                <a:solidFill>
-                  <a:srgbClr val="1C2A33"/>
-                </a:solidFill>
-                <a:latin typeface="微软雅黑"/>
-                <a:ea typeface="微软雅黑"/>
-                <a:cs typeface="微软雅黑"/>
-              </a:rPr>
-              <a:t/>
-            </a:r>
-          </a:p>
-        </p:txBody>
-      </p:sp>
-      <p:sp>
-        <p:nvSpPr>
-          <p:cNvPr id="7" name="TextBox 6"/>
-          <p:cNvSpPr txBox="1"/>
-          <p:nvPr/>
-        </p:nvSpPr>
-        <p:spPr>
-          <a:xfrm>
-            <a:off x="1371600" y="1920240"/>
-            <a:ext cx="9997135" cy="957072"/>
-          </a:xfrm>
-          <a:prstGeom prst="rect">
-            <a:avLst/>
-          </a:prstGeom>
-          <a:noFill/>
-        </p:spPr>
-        <p:txBody>
-          <a:bodyPr wrap="square" anchor="t" lIns="0" rIns="0" tIns="0" bIns="0">
-            <a:spAutoFit/>
-          </a:bodyPr>
-          <a:lstStyle/>
-          <a:p>
-            <a:pPr algn="l">
-              <a:lnSpc>
-                <a:spcPct val="128000"/>
-              </a:lnSpc>
-            </a:pPr>
-            <a:r>
-              <a:rPr sz="1300" b="0">
-                <a:solidFill>
-                  <a:srgbClr val="1C2A33"/>
-                </a:solidFill>
-                <a:latin typeface="楷体"/>
-                <a:ea typeface="楷体"/>
-                <a:cs typeface="楷体"/>
-              </a:rPr>
-              <a:t>① 青蒿素：第三人称+发现过程+准确平实+团队谦逊。</a:t>
-            </a:r>
-          </a:p>
-        </p:txBody>
-      </p:sp>
-      <p:sp>
-        <p:nvSpPr>
-          <p:cNvPr id="8" name="Rounded Rectangle 7"/>
+          <p:cNvPr id="14" name="Oval 13"/>
           <p:cNvSpPr/>
           <p:nvPr/>
         </p:nvSpPr>
         <p:spPr>
           <a:xfrm>
-            <a:off x="640080" y="3078480"/>
-            <a:ext cx="10911535" cy="1597152"/>
-          </a:xfrm>
-          <a:prstGeom prst="roundRect">
+            <a:off x="8386876" y="2450592"/>
+            <a:ext cx="548640" cy="548640"/>
+          </a:xfrm>
+          <a:prstGeom prst="ellipse">
             <a:avLst/>
           </a:prstGeom>
           <a:solidFill>
-            <a:srgbClr val="FFFFFF"/>
+            <a:srgbClr val="C8A86B"/>
           </a:solidFill>
-          <a:ln w="22860">
-            <a:solidFill>
-              <a:srgbClr val="C8A86B"/>
-            </a:solidFill>
+          <a:ln>
+            <a:noFill/>
           </a:ln>
           <a:effectLst/>
         </p:spPr>
@@ -5054,14 +5422,14 @@
       </p:sp>
       <p:sp>
         <p:nvSpPr>
-          <p:cNvPr id="9" name="TextBox 8"/>
+          <p:cNvPr id="15" name="TextBox 14"/>
           <p:cNvSpPr txBox="1"/>
           <p:nvPr/>
         </p:nvSpPr>
         <p:spPr>
           <a:xfrm>
-            <a:off x="1371600" y="3188208"/>
-            <a:ext cx="9997135" cy="457200"/>
+            <a:off x="8386876" y="2514600"/>
+            <a:ext cx="548640" cy="411480"/>
           </a:xfrm>
           <a:prstGeom prst="rect">
             <a:avLst/>
@@ -5074,35 +5442,31 @@
           </a:bodyPr>
           <a:lstStyle/>
           <a:p>
-            <a:pPr algn="l">
-              <a:lnSpc>
-                <a:spcPct val="110000"/>
-              </a:lnSpc>
-            </a:pPr>
-            <a:r>
-              <a:rPr sz="1600" b="1">
-                <a:solidFill>
-                  <a:srgbClr val="1C2A33"/>
+            <a:pPr algn="ctr"/>
+            <a:r>
+              <a:rPr sz="2000" b="1">
+                <a:solidFill>
+                  <a:srgbClr val="FFFFFF"/>
                 </a:solidFill>
                 <a:latin typeface="微软雅黑"/>
                 <a:ea typeface="微软雅黑"/>
                 <a:cs typeface="微软雅黑"/>
               </a:rPr>
-              <a:t/>
-            </a:r>
-          </a:p>
-        </p:txBody>
-      </p:sp>
-      <p:sp>
-        <p:nvSpPr>
-          <p:cNvPr id="10" name="TextBox 9"/>
+              <a:t>3</a:t>
+            </a:r>
+          </a:p>
+        </p:txBody>
+      </p:sp>
+      <p:sp>
+        <p:nvSpPr>
+          <p:cNvPr id="16" name="TextBox 15"/>
           <p:cNvSpPr txBox="1"/>
           <p:nvPr/>
         </p:nvSpPr>
         <p:spPr>
           <a:xfrm>
-            <a:off x="1371600" y="3627120"/>
-            <a:ext cx="9997135" cy="957072"/>
+            <a:off x="9072676" y="2468880"/>
+            <a:ext cx="2296058" cy="777240"/>
           </a:xfrm>
           <a:prstGeom prst="rect">
             <a:avLst/>
@@ -5117,139 +5481,11 @@
           <a:p>
             <a:pPr algn="l">
               <a:lnSpc>
-                <a:spcPct val="128000"/>
+                <a:spcPct val="135000"/>
               </a:lnSpc>
             </a:pPr>
             <a:r>
-              <a:rPr sz="1300" b="0">
-                <a:solidFill>
-                  <a:srgbClr val="1C2A33"/>
-                </a:solidFill>
-                <a:latin typeface="楷体"/>
-                <a:ea typeface="楷体"/>
-                <a:cs typeface="楷体"/>
-              </a:rPr>
-              <a:t>② 历程：第一人称+成长阶段+叙事说理+个人志趣。</a:t>
-            </a:r>
-          </a:p>
-        </p:txBody>
-      </p:sp>
-      <p:sp>
-        <p:nvSpPr>
-          <p:cNvPr id="11" name="Rounded Rectangle 10"/>
-          <p:cNvSpPr/>
-          <p:nvPr/>
-        </p:nvSpPr>
-        <p:spPr>
-          <a:xfrm>
-            <a:off x="640080" y="4785360"/>
-            <a:ext cx="10911535" cy="1597152"/>
-          </a:xfrm>
-          <a:prstGeom prst="roundRect">
-            <a:avLst/>
-          </a:prstGeom>
-          <a:solidFill>
-            <a:srgbClr val="FFFFFF"/>
-          </a:solidFill>
-          <a:ln w="22860">
-            <a:solidFill>
-              <a:srgbClr val="C8A86B"/>
-            </a:solidFill>
-          </a:ln>
-          <a:effectLst/>
-        </p:spPr>
-        <p:style>
-          <a:lnRef idx="1">
-            <a:schemeClr val="accent1"/>
-          </a:lnRef>
-          <a:fillRef idx="3">
-            <a:schemeClr val="accent1"/>
-          </a:fillRef>
-          <a:effectRef idx="2">
-            <a:schemeClr val="accent1"/>
-          </a:effectRef>
-          <a:fontRef idx="minor">
-            <a:schemeClr val="lt1"/>
-          </a:fontRef>
-        </p:style>
-        <p:txBody>
-          <a:bodyPr rtlCol="0" anchor="ctr"/>
-          <a:lstStyle/>
-          <a:p>
-            <a:pPr algn="ctr"/>
-          </a:p>
-        </p:txBody>
-      </p:sp>
-      <p:sp>
-        <p:nvSpPr>
-          <p:cNvPr id="12" name="TextBox 11"/>
-          <p:cNvSpPr txBox="1"/>
-          <p:nvPr/>
-        </p:nvSpPr>
-        <p:spPr>
-          <a:xfrm>
-            <a:off x="1371600" y="4895088"/>
-            <a:ext cx="9997135" cy="457200"/>
-          </a:xfrm>
-          <a:prstGeom prst="rect">
-            <a:avLst/>
-          </a:prstGeom>
-          <a:noFill/>
-        </p:spPr>
-        <p:txBody>
-          <a:bodyPr wrap="square" anchor="t" lIns="0" rIns="0" tIns="0" bIns="0">
-            <a:spAutoFit/>
-          </a:bodyPr>
-          <a:lstStyle/>
-          <a:p>
-            <a:pPr algn="l">
-              <a:lnSpc>
-                <a:spcPct val="110000"/>
-              </a:lnSpc>
-            </a:pPr>
-            <a:r>
-              <a:rPr sz="1600" b="1">
-                <a:solidFill>
-                  <a:srgbClr val="1C2A33"/>
-                </a:solidFill>
-                <a:latin typeface="微软雅黑"/>
-                <a:ea typeface="微软雅黑"/>
-                <a:cs typeface="微软雅黑"/>
-              </a:rPr>
-              <a:t/>
-            </a:r>
-          </a:p>
-        </p:txBody>
-      </p:sp>
-      <p:sp>
-        <p:nvSpPr>
-          <p:cNvPr id="13" name="TextBox 12"/>
-          <p:cNvSpPr txBox="1"/>
-          <p:nvPr/>
-        </p:nvSpPr>
-        <p:spPr>
-          <a:xfrm>
-            <a:off x="1371600" y="5334000"/>
-            <a:ext cx="9997135" cy="957072"/>
-          </a:xfrm>
-          <a:prstGeom prst="rect">
-            <a:avLst/>
-          </a:prstGeom>
-          <a:noFill/>
-        </p:spPr>
-        <p:txBody>
-          <a:bodyPr wrap="square" anchor="t" lIns="0" rIns="0" tIns="0" bIns="0">
-            <a:spAutoFit/>
-          </a:bodyPr>
-          <a:lstStyle/>
-          <a:p>
-            <a:pPr algn="l">
-              <a:lnSpc>
-                <a:spcPct val="128000"/>
-              </a:lnSpc>
-            </a:pPr>
-            <a:r>
-              <a:rPr sz="1300" b="0">
+              <a:rPr sz="1450" b="1">
                 <a:solidFill>
                   <a:srgbClr val="1C2A33"/>
                 </a:solidFill>
@@ -5264,7 +5500,7 @@
       </p:sp>
       <p:sp>
         <p:nvSpPr>
-          <p:cNvPr id="14" name="TextBox 13"/>
+          <p:cNvPr id="17" name="TextBox 16"/>
           <p:cNvSpPr txBox="1"/>
           <p:nvPr/>
         </p:nvSpPr>
@@ -5319,20 +5555,61 @@
       <p:grpSpPr/>
       <p:sp>
         <p:nvSpPr>
-          <p:cNvPr id="2" name="Rectangle 1"/>
+          <p:cNvPr id="2" name="TextBox 1"/>
+          <p:cNvSpPr txBox="1"/>
+          <p:nvPr/>
+        </p:nvSpPr>
+        <p:spPr>
+          <a:xfrm>
+            <a:off x="640080" y="640080"/>
+            <a:ext cx="6400800" cy="365760"/>
+          </a:xfrm>
+          <a:prstGeom prst="rect">
+            <a:avLst/>
+          </a:prstGeom>
+          <a:noFill/>
+        </p:spPr>
+        <p:txBody>
+          <a:bodyPr wrap="square" anchor="t" lIns="0" rIns="0" tIns="0" bIns="0">
+            <a:spAutoFit/>
+          </a:bodyPr>
+          <a:lstStyle/>
+          <a:p>
+            <a:pPr algn="l">
+              <a:spcAft>
+                <a:spcPts val="0"/>
+              </a:spcAft>
+            </a:pPr>
+            <a:r>
+              <a:rPr sz="1300" b="1">
+                <a:solidFill>
+                  <a:srgbClr val="B23A2A"/>
+                </a:solidFill>
+                <a:latin typeface="微软雅黑"/>
+                <a:ea typeface="微软雅黑"/>
+                <a:cs typeface="微软雅黑"/>
+              </a:rPr>
+              <a:t>方法</a:t>
+            </a:r>
+          </a:p>
+        </p:txBody>
+      </p:sp>
+      <p:sp>
+        <p:nvSpPr>
+          <p:cNvPr id="3" name="Rectangle 2"/>
           <p:cNvSpPr/>
           <p:nvPr/>
         </p:nvSpPr>
         <p:spPr>
           <a:xfrm>
-            <a:off x="0" y="0"/>
-            <a:ext cx="12191695" cy="6858000"/>
+            <a:off x="640080" y="1097280"/>
+            <a:ext cx="822960" cy="30480"/>
           </a:xfrm>
           <a:prstGeom prst="rect">
             <a:avLst/>
           </a:prstGeom>
           <a:solidFill>
-            <a:srgbClr val="F4EFE6"/>
+            <a:srgbClr val="B23A2A"/>
           </a:solidFill>
           <a:ln>
             <a:noFill/>
@@ -5363,14 +5640,14 @@
       </p:sp>
       <p:sp>
         <p:nvSpPr>
-          <p:cNvPr id="3" name="TextBox 2"/>
+          <p:cNvPr id="4" name="TextBox 3"/>
           <p:cNvSpPr txBox="1"/>
           <p:nvPr/>
         </p:nvSpPr>
         <p:spPr>
           <a:xfrm>
-            <a:off x="640080" y="640080"/>
-            <a:ext cx="6400800" cy="365760"/>
+            <a:off x="640080" y="1325880"/>
+            <a:ext cx="10515600" cy="548640"/>
           </a:xfrm>
           <a:prstGeom prst="rect">
             <a:avLst/>
@@ -5383,37 +5660,247 @@
           </a:bodyPr>
           <a:lstStyle/>
           <a:p>
-            <a:pPr algn="l">
-              <a:spcAft>
-                <a:spcPts val="0"/>
-              </a:spcAft>
-            </a:pPr>
-            <a:r>
-              <a:rPr sz="1300" b="1">
-                <a:solidFill>
-                  <a:srgbClr val="2E7D6B"/>
+            <a:pPr algn="l"/>
+            <a:r>
+              <a:rPr sz="2600" b="1">
+                <a:solidFill>
+                  <a:srgbClr val="1C2A33"/>
+                </a:solidFill>
+                <a:latin typeface="楷体"/>
+                <a:ea typeface="楷体"/>
+                <a:cs typeface="楷体"/>
+              </a:rPr>
+              <a:t>方法</a:t>
+            </a:r>
+          </a:p>
+        </p:txBody>
+      </p:sp>
+      <p:sp>
+        <p:nvSpPr>
+          <p:cNvPr id="5" name="Rounded Rectangle 4"/>
+          <p:cNvSpPr/>
+          <p:nvPr/>
+        </p:nvSpPr>
+        <p:spPr>
+          <a:xfrm>
+            <a:off x="640080" y="2194560"/>
+            <a:ext cx="2453563" cy="3931920"/>
+          </a:xfrm>
+          <a:prstGeom prst="roundRect">
+            <a:avLst/>
+          </a:prstGeom>
+          <a:solidFill>
+            <a:srgbClr val="FFFFFF"/>
+          </a:solidFill>
+          <a:ln w="20320">
+            <a:solidFill>
+              <a:srgbClr val="B23A2A"/>
+            </a:solidFill>
+          </a:ln>
+          <a:effectLst/>
+        </p:spPr>
+        <p:style>
+          <a:lnRef idx="1">
+            <a:schemeClr val="accent1"/>
+          </a:lnRef>
+          <a:fillRef idx="3">
+            <a:schemeClr val="accent1"/>
+          </a:fillRef>
+          <a:effectRef idx="2">
+            <a:schemeClr val="accent1"/>
+          </a:effectRef>
+          <a:fontRef idx="minor">
+            <a:schemeClr val="lt1"/>
+          </a:fontRef>
+        </p:style>
+        <p:txBody>
+          <a:bodyPr rtlCol="0" anchor="ctr"/>
+          <a:lstStyle/>
+          <a:p>
+            <a:pPr algn="ctr"/>
+          </a:p>
+        </p:txBody>
+      </p:sp>
+      <p:sp>
+        <p:nvSpPr>
+          <p:cNvPr id="6" name="Oval 5"/>
+          <p:cNvSpPr/>
+          <p:nvPr/>
+        </p:nvSpPr>
+        <p:spPr>
+          <a:xfrm>
+            <a:off x="868680" y="2450592"/>
+            <a:ext cx="548640" cy="548640"/>
+          </a:xfrm>
+          <a:prstGeom prst="ellipse">
+            <a:avLst/>
+          </a:prstGeom>
+          <a:solidFill>
+            <a:srgbClr val="B23A2A"/>
+          </a:solidFill>
+          <a:ln>
+            <a:noFill/>
+          </a:ln>
+          <a:effectLst/>
+        </p:spPr>
+        <p:style>
+          <a:lnRef idx="1">
+            <a:schemeClr val="accent1"/>
+          </a:lnRef>
+          <a:fillRef idx="3">
+            <a:schemeClr val="accent1"/>
+          </a:fillRef>
+          <a:effectRef idx="2">
+            <a:schemeClr val="accent1"/>
+          </a:effectRef>
+          <a:fontRef idx="minor">
+            <a:schemeClr val="lt1"/>
+          </a:fontRef>
+        </p:style>
+        <p:txBody>
+          <a:bodyPr rtlCol="0" anchor="ctr"/>
+          <a:lstStyle/>
+          <a:p>
+            <a:pPr algn="ctr"/>
+          </a:p>
+        </p:txBody>
+      </p:sp>
+      <p:sp>
+        <p:nvSpPr>
+          <p:cNvPr id="7" name="TextBox 6"/>
+          <p:cNvSpPr txBox="1"/>
+          <p:nvPr/>
+        </p:nvSpPr>
+        <p:spPr>
+          <a:xfrm>
+            <a:off x="868680" y="2514600"/>
+            <a:ext cx="548640" cy="411480"/>
+          </a:xfrm>
+          <a:prstGeom prst="rect">
+            <a:avLst/>
+          </a:prstGeom>
+          <a:noFill/>
+        </p:spPr>
+        <p:txBody>
+          <a:bodyPr wrap="square" anchor="t" lIns="0" rIns="0" tIns="0" bIns="0">
+            <a:spAutoFit/>
+          </a:bodyPr>
+          <a:lstStyle/>
+          <a:p>
+            <a:pPr algn="ctr"/>
+            <a:r>
+              <a:rPr sz="2000" b="1">
+                <a:solidFill>
+                  <a:srgbClr val="FFFFFF"/>
                 </a:solidFill>
                 <a:latin typeface="微软雅黑"/>
                 <a:ea typeface="微软雅黑"/>
                 <a:cs typeface="微软雅黑"/>
               </a:rPr>
-              <a:t>学习路径</a:t>
-            </a:r>
-          </a:p>
-        </p:txBody>
-      </p:sp>
-      <p:sp>
-        <p:nvSpPr>
-          <p:cNvPr id="4" name="Rectangle 3"/>
+              <a:t>1</a:t>
+            </a:r>
+          </a:p>
+        </p:txBody>
+      </p:sp>
+      <p:sp>
+        <p:nvSpPr>
+          <p:cNvPr id="8" name="TextBox 7"/>
+          <p:cNvSpPr txBox="1"/>
+          <p:nvPr/>
+        </p:nvSpPr>
+        <p:spPr>
+          <a:xfrm>
+            <a:off x="1554480" y="2468880"/>
+            <a:ext cx="1356283" cy="777240"/>
+          </a:xfrm>
+          <a:prstGeom prst="rect">
+            <a:avLst/>
+          </a:prstGeom>
+          <a:noFill/>
+        </p:spPr>
+        <p:txBody>
+          <a:bodyPr wrap="square" anchor="t" lIns="0" rIns="0" tIns="0" bIns="0">
+            <a:spAutoFit/>
+          </a:bodyPr>
+          <a:lstStyle/>
+          <a:p>
+            <a:pPr algn="l">
+              <a:lnSpc>
+                <a:spcPct val="135000"/>
+              </a:lnSpc>
+            </a:pPr>
+            <a:r>
+              <a:rPr sz="1450" b="1">
+                <a:solidFill>
+                  <a:srgbClr val="1C2A33"/>
+                </a:solidFill>
+                <a:latin typeface="楷体"/>
+                <a:ea typeface="楷体"/>
+                <a:cs typeface="楷体"/>
+              </a:rPr>
+              <a:t>① 双栏比较法。</a:t>
+            </a:r>
+          </a:p>
+        </p:txBody>
+      </p:sp>
+      <p:sp>
+        <p:nvSpPr>
+          <p:cNvPr id="9" name="Rounded Rectangle 8"/>
           <p:cNvSpPr/>
           <p:nvPr/>
         </p:nvSpPr>
         <p:spPr>
           <a:xfrm>
-            <a:off x="640080" y="1097280"/>
-            <a:ext cx="822960" cy="30480"/>
-          </a:xfrm>
-          <a:prstGeom prst="rect">
+            <a:off x="3459403" y="2194560"/>
+            <a:ext cx="2453563" cy="3931920"/>
+          </a:xfrm>
+          <a:prstGeom prst="roundRect">
+            <a:avLst/>
+          </a:prstGeom>
+          <a:solidFill>
+            <a:srgbClr val="FFFFFF"/>
+          </a:solidFill>
+          <a:ln w="20320">
+            <a:solidFill>
+              <a:srgbClr val="2E7D6B"/>
+            </a:solidFill>
+          </a:ln>
+          <a:effectLst/>
+        </p:spPr>
+        <p:style>
+          <a:lnRef idx="1">
+            <a:schemeClr val="accent1"/>
+          </a:lnRef>
+          <a:fillRef idx="3">
+            <a:schemeClr val="accent1"/>
+          </a:fillRef>
+          <a:effectRef idx="2">
+            <a:schemeClr val="accent1"/>
+          </a:effectRef>
+          <a:fontRef idx="minor">
+            <a:schemeClr val="lt1"/>
+          </a:fontRef>
+        </p:style>
+        <p:txBody>
+          <a:bodyPr rtlCol="0" anchor="ctr"/>
+          <a:lstStyle/>
+          <a:p>
+            <a:pPr algn="ctr"/>
+          </a:p>
+        </p:txBody>
+      </p:sp>
+      <p:sp>
+        <p:nvSpPr>
+          <p:cNvPr id="10" name="Oval 9"/>
+          <p:cNvSpPr/>
+          <p:nvPr/>
+        </p:nvSpPr>
+        <p:spPr>
+          <a:xfrm>
+            <a:off x="3688003" y="2450592"/>
+            <a:ext cx="548640" cy="548640"/>
+          </a:xfrm>
+          <a:prstGeom prst="ellipse">
             <a:avLst/>
           </a:prstGeom>
           <a:solidFill>
@@ -5448,14 +5935,92 @@
       </p:sp>
       <p:sp>
         <p:nvSpPr>
-          <p:cNvPr id="5" name="Rounded Rectangle 4"/>
+          <p:cNvPr id="11" name="TextBox 10"/>
+          <p:cNvSpPr txBox="1"/>
+          <p:nvPr/>
+        </p:nvSpPr>
+        <p:spPr>
+          <a:xfrm>
+            <a:off x="3688003" y="2514600"/>
+            <a:ext cx="548640" cy="411480"/>
+          </a:xfrm>
+          <a:prstGeom prst="rect">
+            <a:avLst/>
+          </a:prstGeom>
+          <a:noFill/>
+        </p:spPr>
+        <p:txBody>
+          <a:bodyPr wrap="square" anchor="t" lIns="0" rIns="0" tIns="0" bIns="0">
+            <a:spAutoFit/>
+          </a:bodyPr>
+          <a:lstStyle/>
+          <a:p>
+            <a:pPr algn="ctr"/>
+            <a:r>
+              <a:rPr sz="2000" b="1">
+                <a:solidFill>
+                  <a:srgbClr val="FFFFFF"/>
+                </a:solidFill>
+                <a:latin typeface="微软雅黑"/>
+                <a:ea typeface="微软雅黑"/>
+                <a:cs typeface="微软雅黑"/>
+              </a:rPr>
+              <a:t>2</a:t>
+            </a:r>
+          </a:p>
+        </p:txBody>
+      </p:sp>
+      <p:sp>
+        <p:nvSpPr>
+          <p:cNvPr id="12" name="TextBox 11"/>
+          <p:cNvSpPr txBox="1"/>
+          <p:nvPr/>
+        </p:nvSpPr>
+        <p:spPr>
+          <a:xfrm>
+            <a:off x="4373803" y="2468880"/>
+            <a:ext cx="1356283" cy="777240"/>
+          </a:xfrm>
+          <a:prstGeom prst="rect">
+            <a:avLst/>
+          </a:prstGeom>
+          <a:noFill/>
+        </p:spPr>
+        <p:txBody>
+          <a:bodyPr wrap="square" anchor="t" lIns="0" rIns="0" tIns="0" bIns="0">
+            <a:spAutoFit/>
+          </a:bodyPr>
+          <a:lstStyle/>
+          <a:p>
+            <a:pPr algn="l">
+              <a:lnSpc>
+                <a:spcPct val="135000"/>
+              </a:lnSpc>
+            </a:pPr>
+            <a:r>
+              <a:rPr sz="1450" b="1">
+                <a:solidFill>
+                  <a:srgbClr val="1C2A33"/>
+                </a:solidFill>
+                <a:latin typeface="楷体"/>
+                <a:ea typeface="楷体"/>
+                <a:cs typeface="楷体"/>
+              </a:rPr>
+              <a:t>② 范式命名法。</a:t>
+            </a:r>
+          </a:p>
+        </p:txBody>
+      </p:sp>
+      <p:sp>
+        <p:nvSpPr>
+          <p:cNvPr id="13" name="Rounded Rectangle 12"/>
           <p:cNvSpPr/>
           <p:nvPr/>
         </p:nvSpPr>
         <p:spPr>
           <a:xfrm>
-            <a:off x="640080" y="1371600"/>
-            <a:ext cx="10911535" cy="685800"/>
+            <a:off x="6278727" y="2194560"/>
+            <a:ext cx="2453563" cy="3931920"/>
           </a:xfrm>
           <a:prstGeom prst="roundRect">
             <a:avLst/>
@@ -5463,9 +6028,9 @@
           <a:solidFill>
             <a:srgbClr val="FFFFFF"/>
           </a:solidFill>
-          <a:ln w="22860">
+          <a:ln w="20320">
             <a:solidFill>
-              <a:srgbClr val="2E7D6B"/>
+              <a:srgbClr val="C8A86B"/>
             </a:solidFill>
           </a:ln>
           <a:effectLst/>
@@ -5494,20 +6059,20 @@
       </p:sp>
       <p:sp>
         <p:nvSpPr>
-          <p:cNvPr id="6" name="Oval 5"/>
+          <p:cNvPr id="14" name="Oval 13"/>
           <p:cNvSpPr/>
           <p:nvPr/>
         </p:nvSpPr>
         <p:spPr>
           <a:xfrm>
-            <a:off x="804672" y="1536192"/>
-            <a:ext cx="457200" cy="457200"/>
+            <a:off x="6507327" y="2450592"/>
+            <a:ext cx="548640" cy="548640"/>
           </a:xfrm>
           <a:prstGeom prst="ellipse">
             <a:avLst/>
           </a:prstGeom>
           <a:solidFill>
-            <a:srgbClr val="2E7D6B"/>
+            <a:srgbClr val="C8A86B"/>
           </a:solidFill>
           <a:ln>
             <a:noFill/>
@@ -5538,14 +6103,14 @@
       </p:sp>
       <p:sp>
         <p:nvSpPr>
-          <p:cNvPr id="7" name="TextBox 6"/>
+          <p:cNvPr id="15" name="TextBox 14"/>
           <p:cNvSpPr txBox="1"/>
           <p:nvPr/>
         </p:nvSpPr>
         <p:spPr>
           <a:xfrm>
-            <a:off x="804672" y="1591056"/>
-            <a:ext cx="457200" cy="384048"/>
+            <a:off x="6507327" y="2514600"/>
+            <a:ext cx="548640" cy="411480"/>
           </a:xfrm>
           <a:prstGeom prst="rect">
             <a:avLst/>
@@ -5560,7 +6125,7 @@
           <a:p>
             <a:pPr algn="ctr"/>
             <a:r>
-              <a:rPr sz="1600" b="1">
+              <a:rPr sz="2000" b="1">
                 <a:solidFill>
                   <a:srgbClr val="FFFFFF"/>
                 </a:solidFill>
@@ -5568,21 +6133,21 @@
                 <a:ea typeface="微软雅黑"/>
                 <a:cs typeface="微软雅黑"/>
               </a:rPr>
-              <a:t>1</a:t>
-            </a:r>
-          </a:p>
-        </p:txBody>
-      </p:sp>
-      <p:sp>
-        <p:nvSpPr>
-          <p:cNvPr id="8" name="TextBox 7"/>
+              <a:t>3</a:t>
+            </a:r>
+          </a:p>
+        </p:txBody>
+      </p:sp>
+      <p:sp>
+        <p:nvSpPr>
+          <p:cNvPr id="16" name="TextBox 15"/>
           <p:cNvSpPr txBox="1"/>
           <p:nvPr/>
         </p:nvSpPr>
         <p:spPr>
           <a:xfrm>
-            <a:off x="1371600" y="1481328"/>
-            <a:ext cx="9997135" cy="484632"/>
+            <a:off x="7193127" y="2468880"/>
+            <a:ext cx="1356283" cy="777240"/>
           </a:xfrm>
           <a:prstGeom prst="rect">
             <a:avLst/>
@@ -5597,33 +6162,33 @@
           <a:p>
             <a:pPr algn="l">
               <a:lnSpc>
-                <a:spcPct val="110000"/>
+                <a:spcPct val="135000"/>
               </a:lnSpc>
             </a:pPr>
             <a:r>
-              <a:rPr sz="1600" b="1">
+              <a:rPr sz="1450" b="1">
                 <a:solidFill>
                   <a:srgbClr val="1C2A33"/>
                 </a:solidFill>
-                <a:latin typeface="微软雅黑"/>
-                <a:ea typeface="微软雅黑"/>
-                <a:cs typeface="微软雅黑"/>
+                <a:latin typeface="楷体"/>
+                <a:ea typeface="楷体"/>
+                <a:cs typeface="楷体"/>
               </a:rPr>
-              <a:t>Step 1 导入</a:t>
-            </a:r>
-          </a:p>
-        </p:txBody>
-      </p:sp>
-      <p:sp>
-        <p:nvSpPr>
-          <p:cNvPr id="9" name="Rounded Rectangle 8"/>
+              <a:t>③ 归纳法。</a:t>
+            </a:r>
+          </a:p>
+        </p:txBody>
+      </p:sp>
+      <p:sp>
+        <p:nvSpPr>
+          <p:cNvPr id="17" name="Rounded Rectangle 16"/>
           <p:cNvSpPr/>
           <p:nvPr/>
         </p:nvSpPr>
         <p:spPr>
           <a:xfrm>
-            <a:off x="640080" y="2194560"/>
-            <a:ext cx="10911535" cy="685800"/>
+            <a:off x="9098051" y="2194560"/>
+            <a:ext cx="2453563" cy="3931920"/>
           </a:xfrm>
           <a:prstGeom prst="roundRect">
             <a:avLst/>
@@ -5631,9 +6196,9 @@
           <a:solidFill>
             <a:srgbClr val="FFFFFF"/>
           </a:solidFill>
-          <a:ln w="22860">
+          <a:ln w="20320">
             <a:solidFill>
-              <a:srgbClr val="2E7D6B"/>
+              <a:srgbClr val="6B6258"/>
             </a:solidFill>
           </a:ln>
           <a:effectLst/>
@@ -5662,20 +6227,20 @@
       </p:sp>
       <p:sp>
         <p:nvSpPr>
-          <p:cNvPr id="10" name="Oval 9"/>
+          <p:cNvPr id="18" name="Oval 17"/>
           <p:cNvSpPr/>
           <p:nvPr/>
         </p:nvSpPr>
         <p:spPr>
           <a:xfrm>
-            <a:off x="804672" y="2359152"/>
-            <a:ext cx="457200" cy="457200"/>
+            <a:off x="9326651" y="2450592"/>
+            <a:ext cx="548640" cy="548640"/>
           </a:xfrm>
           <a:prstGeom prst="ellipse">
             <a:avLst/>
           </a:prstGeom>
           <a:solidFill>
-            <a:srgbClr val="2E7D6B"/>
+            <a:srgbClr val="6B6258"/>
           </a:solidFill>
           <a:ln>
             <a:noFill/>
@@ -5706,14 +6271,14 @@
       </p:sp>
       <p:sp>
         <p:nvSpPr>
-          <p:cNvPr id="11" name="TextBox 10"/>
+          <p:cNvPr id="19" name="TextBox 18"/>
           <p:cNvSpPr txBox="1"/>
           <p:nvPr/>
         </p:nvSpPr>
         <p:spPr>
           <a:xfrm>
-            <a:off x="804672" y="2414016"/>
-            <a:ext cx="457200" cy="384048"/>
+            <a:off x="9326651" y="2514600"/>
+            <a:ext cx="548640" cy="411480"/>
           </a:xfrm>
           <a:prstGeom prst="rect">
             <a:avLst/>
@@ -5728,343 +6293,7 @@
           <a:p>
             <a:pPr algn="ctr"/>
             <a:r>
-              <a:rPr sz="1600" b="1">
-                <a:solidFill>
-                  <a:srgbClr val="FFFFFF"/>
-                </a:solidFill>
-                <a:latin typeface="微软雅黑"/>
-                <a:ea typeface="微软雅黑"/>
-                <a:cs typeface="微软雅黑"/>
-              </a:rPr>
-              <a:t>2</a:t>
-            </a:r>
-          </a:p>
-        </p:txBody>
-      </p:sp>
-      <p:sp>
-        <p:nvSpPr>
-          <p:cNvPr id="12" name="TextBox 11"/>
-          <p:cNvSpPr txBox="1"/>
-          <p:nvPr/>
-        </p:nvSpPr>
-        <p:spPr>
-          <a:xfrm>
-            <a:off x="1371600" y="2304288"/>
-            <a:ext cx="9997135" cy="484632"/>
-          </a:xfrm>
-          <a:prstGeom prst="rect">
-            <a:avLst/>
-          </a:prstGeom>
-          <a:noFill/>
-        </p:spPr>
-        <p:txBody>
-          <a:bodyPr wrap="square" anchor="t" lIns="0" rIns="0" tIns="0" bIns="0">
-            <a:spAutoFit/>
-          </a:bodyPr>
-          <a:lstStyle/>
-          <a:p>
-            <a:pPr algn="l">
-              <a:lnSpc>
-                <a:spcPct val="110000"/>
-              </a:lnSpc>
-            </a:pPr>
-            <a:r>
-              <a:rPr sz="1600" b="1">
-                <a:solidFill>
-                  <a:srgbClr val="1C2A33"/>
-                </a:solidFill>
-                <a:latin typeface="微软雅黑"/>
-                <a:ea typeface="微软雅黑"/>
-                <a:cs typeface="微软雅黑"/>
-              </a:rPr>
-              <a:t>Step 2 双栏</a:t>
-            </a:r>
-          </a:p>
-        </p:txBody>
-      </p:sp>
-      <p:sp>
-        <p:nvSpPr>
-          <p:cNvPr id="13" name="Rounded Rectangle 12"/>
-          <p:cNvSpPr/>
-          <p:nvPr/>
-        </p:nvSpPr>
-        <p:spPr>
-          <a:xfrm>
-            <a:off x="640080" y="3017520"/>
-            <a:ext cx="10911535" cy="685800"/>
-          </a:xfrm>
-          <a:prstGeom prst="roundRect">
-            <a:avLst/>
-          </a:prstGeom>
-          <a:solidFill>
-            <a:srgbClr val="FFFFFF"/>
-          </a:solidFill>
-          <a:ln w="22860">
-            <a:solidFill>
-              <a:srgbClr val="2E7D6B"/>
-            </a:solidFill>
-          </a:ln>
-          <a:effectLst/>
-        </p:spPr>
-        <p:style>
-          <a:lnRef idx="1">
-            <a:schemeClr val="accent1"/>
-          </a:lnRef>
-          <a:fillRef idx="3">
-            <a:schemeClr val="accent1"/>
-          </a:fillRef>
-          <a:effectRef idx="2">
-            <a:schemeClr val="accent1"/>
-          </a:effectRef>
-          <a:fontRef idx="minor">
-            <a:schemeClr val="lt1"/>
-          </a:fontRef>
-        </p:style>
-        <p:txBody>
-          <a:bodyPr rtlCol="0" anchor="ctr"/>
-          <a:lstStyle/>
-          <a:p>
-            <a:pPr algn="ctr"/>
-          </a:p>
-        </p:txBody>
-      </p:sp>
-      <p:sp>
-        <p:nvSpPr>
-          <p:cNvPr id="14" name="Oval 13"/>
-          <p:cNvSpPr/>
-          <p:nvPr/>
-        </p:nvSpPr>
-        <p:spPr>
-          <a:xfrm>
-            <a:off x="804672" y="3182112"/>
-            <a:ext cx="457200" cy="457200"/>
-          </a:xfrm>
-          <a:prstGeom prst="ellipse">
-            <a:avLst/>
-          </a:prstGeom>
-          <a:solidFill>
-            <a:srgbClr val="2E7D6B"/>
-          </a:solidFill>
-          <a:ln>
-            <a:noFill/>
-          </a:ln>
-          <a:effectLst/>
-        </p:spPr>
-        <p:style>
-          <a:lnRef idx="1">
-            <a:schemeClr val="accent1"/>
-          </a:lnRef>
-          <a:fillRef idx="3">
-            <a:schemeClr val="accent1"/>
-          </a:fillRef>
-          <a:effectRef idx="2">
-            <a:schemeClr val="accent1"/>
-          </a:effectRef>
-          <a:fontRef idx="minor">
-            <a:schemeClr val="lt1"/>
-          </a:fontRef>
-        </p:style>
-        <p:txBody>
-          <a:bodyPr rtlCol="0" anchor="ctr"/>
-          <a:lstStyle/>
-          <a:p>
-            <a:pPr algn="ctr"/>
-          </a:p>
-        </p:txBody>
-      </p:sp>
-      <p:sp>
-        <p:nvSpPr>
-          <p:cNvPr id="15" name="TextBox 14"/>
-          <p:cNvSpPr txBox="1"/>
-          <p:nvPr/>
-        </p:nvSpPr>
-        <p:spPr>
-          <a:xfrm>
-            <a:off x="804672" y="3236976"/>
-            <a:ext cx="457200" cy="384048"/>
-          </a:xfrm>
-          <a:prstGeom prst="rect">
-            <a:avLst/>
-          </a:prstGeom>
-          <a:noFill/>
-        </p:spPr>
-        <p:txBody>
-          <a:bodyPr wrap="square" anchor="t" lIns="0" rIns="0" tIns="0" bIns="0">
-            <a:spAutoFit/>
-          </a:bodyPr>
-          <a:lstStyle/>
-          <a:p>
-            <a:pPr algn="ctr"/>
-            <a:r>
-              <a:rPr sz="1600" b="1">
-                <a:solidFill>
-                  <a:srgbClr val="FFFFFF"/>
-                </a:solidFill>
-                <a:latin typeface="微软雅黑"/>
-                <a:ea typeface="微软雅黑"/>
-                <a:cs typeface="微软雅黑"/>
-              </a:rPr>
-              <a:t>3</a:t>
-            </a:r>
-          </a:p>
-        </p:txBody>
-      </p:sp>
-      <p:sp>
-        <p:nvSpPr>
-          <p:cNvPr id="16" name="TextBox 15"/>
-          <p:cNvSpPr txBox="1"/>
-          <p:nvPr/>
-        </p:nvSpPr>
-        <p:spPr>
-          <a:xfrm>
-            <a:off x="1371600" y="3127248"/>
-            <a:ext cx="9997135" cy="484632"/>
-          </a:xfrm>
-          <a:prstGeom prst="rect">
-            <a:avLst/>
-          </a:prstGeom>
-          <a:noFill/>
-        </p:spPr>
-        <p:txBody>
-          <a:bodyPr wrap="square" anchor="t" lIns="0" rIns="0" tIns="0" bIns="0">
-            <a:spAutoFit/>
-          </a:bodyPr>
-          <a:lstStyle/>
-          <a:p>
-            <a:pPr algn="l">
-              <a:lnSpc>
-                <a:spcPct val="110000"/>
-              </a:lnSpc>
-            </a:pPr>
-            <a:r>
-              <a:rPr sz="1600" b="1">
-                <a:solidFill>
-                  <a:srgbClr val="1C2A33"/>
-                </a:solidFill>
-                <a:latin typeface="微软雅黑"/>
-                <a:ea typeface="微软雅黑"/>
-                <a:cs typeface="微软雅黑"/>
-              </a:rPr>
-              <a:t>Step 3 范式</a:t>
-            </a:r>
-          </a:p>
-        </p:txBody>
-      </p:sp>
-      <p:sp>
-        <p:nvSpPr>
-          <p:cNvPr id="17" name="Rounded Rectangle 16"/>
-          <p:cNvSpPr/>
-          <p:nvPr/>
-        </p:nvSpPr>
-        <p:spPr>
-          <a:xfrm>
-            <a:off x="640080" y="3840480"/>
-            <a:ext cx="10911535" cy="685800"/>
-          </a:xfrm>
-          <a:prstGeom prst="roundRect">
-            <a:avLst/>
-          </a:prstGeom>
-          <a:solidFill>
-            <a:srgbClr val="FFFFFF"/>
-          </a:solidFill>
-          <a:ln w="22860">
-            <a:solidFill>
-              <a:srgbClr val="2E7D6B"/>
-            </a:solidFill>
-          </a:ln>
-          <a:effectLst/>
-        </p:spPr>
-        <p:style>
-          <a:lnRef idx="1">
-            <a:schemeClr val="accent1"/>
-          </a:lnRef>
-          <a:fillRef idx="3">
-            <a:schemeClr val="accent1"/>
-          </a:fillRef>
-          <a:effectRef idx="2">
-            <a:schemeClr val="accent1"/>
-          </a:effectRef>
-          <a:fontRef idx="minor">
-            <a:schemeClr val="lt1"/>
-          </a:fontRef>
-        </p:style>
-        <p:txBody>
-          <a:bodyPr rtlCol="0" anchor="ctr"/>
-          <a:lstStyle/>
-          <a:p>
-            <a:pPr algn="ctr"/>
-          </a:p>
-        </p:txBody>
-      </p:sp>
-      <p:sp>
-        <p:nvSpPr>
-          <p:cNvPr id="18" name="Oval 17"/>
-          <p:cNvSpPr/>
-          <p:nvPr/>
-        </p:nvSpPr>
-        <p:spPr>
-          <a:xfrm>
-            <a:off x="804672" y="4005072"/>
-            <a:ext cx="457200" cy="457200"/>
-          </a:xfrm>
-          <a:prstGeom prst="ellipse">
-            <a:avLst/>
-          </a:prstGeom>
-          <a:solidFill>
-            <a:srgbClr val="2E7D6B"/>
-          </a:solidFill>
-          <a:ln>
-            <a:noFill/>
-          </a:ln>
-          <a:effectLst/>
-        </p:spPr>
-        <p:style>
-          <a:lnRef idx="1">
-            <a:schemeClr val="accent1"/>
-          </a:lnRef>
-          <a:fillRef idx="3">
-            <a:schemeClr val="accent1"/>
-          </a:fillRef>
-          <a:effectRef idx="2">
-            <a:schemeClr val="accent1"/>
-          </a:effectRef>
-          <a:fontRef idx="minor">
-            <a:schemeClr val="lt1"/>
-          </a:fontRef>
-        </p:style>
-        <p:txBody>
-          <a:bodyPr rtlCol="0" anchor="ctr"/>
-          <a:lstStyle/>
-          <a:p>
-            <a:pPr algn="ctr"/>
-          </a:p>
-        </p:txBody>
-      </p:sp>
-      <p:sp>
-        <p:nvSpPr>
-          <p:cNvPr id="19" name="TextBox 18"/>
-          <p:cNvSpPr txBox="1"/>
-          <p:nvPr/>
-        </p:nvSpPr>
-        <p:spPr>
-          <a:xfrm>
-            <a:off x="804672" y="4059936"/>
-            <a:ext cx="457200" cy="384048"/>
-          </a:xfrm>
-          <a:prstGeom prst="rect">
-            <a:avLst/>
-          </a:prstGeom>
-          <a:noFill/>
-        </p:spPr>
-        <p:txBody>
-          <a:bodyPr wrap="square" anchor="t" lIns="0" rIns="0" tIns="0" bIns="0">
-            <a:spAutoFit/>
-          </a:bodyPr>
-          <a:lstStyle/>
-          <a:p>
-            <a:pPr algn="ctr"/>
-            <a:r>
-              <a:rPr sz="1600" b="1">
+              <a:rPr sz="2000" b="1">
                 <a:solidFill>
                   <a:srgbClr val="FFFFFF"/>
                 </a:solidFill>
@@ -6085,8 +6314,8 @@
         </p:nvSpPr>
         <p:spPr>
           <a:xfrm>
-            <a:off x="1371600" y="3950208"/>
-            <a:ext cx="9997135" cy="484632"/>
+            <a:off x="10012451" y="2468880"/>
+            <a:ext cx="1356283" cy="777240"/>
           </a:xfrm>
           <a:prstGeom prst="rect">
             <a:avLst/>
@@ -6101,123 +6330,33 @@
           <a:p>
             <a:pPr algn="l">
               <a:lnSpc>
-                <a:spcPct val="110000"/>
+                <a:spcPct val="135000"/>
               </a:lnSpc>
             </a:pPr>
             <a:r>
-              <a:rPr sz="1600" b="1">
+              <a:rPr sz="1450" b="1">
                 <a:solidFill>
                   <a:srgbClr val="1C2A33"/>
                 </a:solidFill>
-                <a:latin typeface="微软雅黑"/>
-                <a:ea typeface="微软雅黑"/>
-                <a:cs typeface="微软雅黑"/>
+                <a:latin typeface="楷体"/>
+                <a:ea typeface="楷体"/>
+                <a:cs typeface="楷体"/>
               </a:rPr>
-              <a:t>Step 4 共性</a:t>
-            </a:r>
-          </a:p>
-        </p:txBody>
-      </p:sp>
-      <p:sp>
-        <p:nvSpPr>
-          <p:cNvPr id="21" name="Rounded Rectangle 20"/>
-          <p:cNvSpPr/>
-          <p:nvPr/>
-        </p:nvSpPr>
-        <p:spPr>
-          <a:xfrm>
-            <a:off x="640080" y="4663440"/>
-            <a:ext cx="10911535" cy="685800"/>
-          </a:xfrm>
-          <a:prstGeom prst="roundRect">
-            <a:avLst/>
-          </a:prstGeom>
-          <a:solidFill>
-            <a:srgbClr val="FFFFFF"/>
-          </a:solidFill>
-          <a:ln w="22860">
-            <a:solidFill>
-              <a:srgbClr val="2E7D6B"/>
-            </a:solidFill>
-          </a:ln>
-          <a:effectLst/>
-        </p:spPr>
-        <p:style>
-          <a:lnRef idx="1">
-            <a:schemeClr val="accent1"/>
-          </a:lnRef>
-          <a:fillRef idx="3">
-            <a:schemeClr val="accent1"/>
-          </a:fillRef>
-          <a:effectRef idx="2">
-            <a:schemeClr val="accent1"/>
-          </a:effectRef>
-          <a:fontRef idx="minor">
-            <a:schemeClr val="lt1"/>
-          </a:fontRef>
-        </p:style>
-        <p:txBody>
-          <a:bodyPr rtlCol="0" anchor="ctr"/>
-          <a:lstStyle/>
-          <a:p>
-            <a:pPr algn="ctr"/>
-          </a:p>
-        </p:txBody>
-      </p:sp>
-      <p:sp>
-        <p:nvSpPr>
-          <p:cNvPr id="22" name="Oval 21"/>
-          <p:cNvSpPr/>
-          <p:nvPr/>
-        </p:nvSpPr>
-        <p:spPr>
-          <a:xfrm>
-            <a:off x="804672" y="4828032"/>
-            <a:ext cx="457200" cy="457200"/>
-          </a:xfrm>
-          <a:prstGeom prst="ellipse">
-            <a:avLst/>
-          </a:prstGeom>
-          <a:solidFill>
-            <a:srgbClr val="2E7D6B"/>
-          </a:solidFill>
-          <a:ln>
-            <a:noFill/>
-          </a:ln>
-          <a:effectLst/>
-        </p:spPr>
-        <p:style>
-          <a:lnRef idx="1">
-            <a:schemeClr val="accent1"/>
-          </a:lnRef>
-          <a:fillRef idx="3">
-            <a:schemeClr val="accent1"/>
-          </a:fillRef>
-          <a:effectRef idx="2">
-            <a:schemeClr val="accent1"/>
-          </a:effectRef>
-          <a:fontRef idx="minor">
-            <a:schemeClr val="lt1"/>
-          </a:fontRef>
-        </p:style>
-        <p:txBody>
-          <a:bodyPr rtlCol="0" anchor="ctr"/>
-          <a:lstStyle/>
-          <a:p>
-            <a:pPr algn="ctr"/>
-          </a:p>
-        </p:txBody>
-      </p:sp>
-      <p:sp>
-        <p:nvSpPr>
-          <p:cNvPr id="23" name="TextBox 22"/>
+              <a:t>④ 迁移法。</a:t>
+            </a:r>
+          </a:p>
+        </p:txBody>
+      </p:sp>
+      <p:sp>
+        <p:nvSpPr>
+          <p:cNvPr id="21" name="TextBox 20"/>
           <p:cNvSpPr txBox="1"/>
           <p:nvPr/>
         </p:nvSpPr>
         <p:spPr>
           <a:xfrm>
-            <a:off x="804672" y="4882896"/>
-            <a:ext cx="457200" cy="384048"/>
+            <a:off x="640080" y="6309360"/>
+            <a:ext cx="10911535" cy="457200"/>
           </a:xfrm>
           <a:prstGeom prst="rect">
             <a:avLst/>
@@ -6230,233 +6369,28 @@
           </a:bodyPr>
           <a:lstStyle/>
           <a:p>
-            <a:pPr algn="ctr"/>
-            <a:r>
-              <a:rPr sz="1600" b="1">
-                <a:solidFill>
-                  <a:srgbClr val="FFFFFF"/>
-                </a:solidFill>
-                <a:latin typeface="微软雅黑"/>
-                <a:ea typeface="微软雅黑"/>
-                <a:cs typeface="微软雅黑"/>
-              </a:rPr>
-              <a:t>5</a:t>
-            </a:r>
-          </a:p>
-        </p:txBody>
-      </p:sp>
-      <p:sp>
-        <p:nvSpPr>
-          <p:cNvPr id="24" name="TextBox 23"/>
-          <p:cNvSpPr txBox="1"/>
-          <p:nvPr/>
-        </p:nvSpPr>
-        <p:spPr>
-          <a:xfrm>
-            <a:off x="1371600" y="4773168"/>
-            <a:ext cx="9997135" cy="484632"/>
-          </a:xfrm>
-          <a:prstGeom prst="rect">
-            <a:avLst/>
-          </a:prstGeom>
-          <a:noFill/>
-        </p:spPr>
-        <p:txBody>
-          <a:bodyPr wrap="square" anchor="t" lIns="0" rIns="0" tIns="0" bIns="0">
-            <a:spAutoFit/>
-          </a:bodyPr>
-          <a:lstStyle/>
-          <a:p>
             <a:pPr algn="l">
               <a:lnSpc>
-                <a:spcPct val="110000"/>
+                <a:spcPct val="140000"/>
               </a:lnSpc>
             </a:pPr>
             <a:r>
-              <a:rPr sz="1600" b="1">
-                <a:solidFill>
-                  <a:srgbClr val="1C2A33"/>
-                </a:solidFill>
-                <a:latin typeface="微软雅黑"/>
-                <a:ea typeface="微软雅黑"/>
-                <a:cs typeface="微软雅黑"/>
+              <a:rPr sz="1250" b="0">
+                <a:solidFill>
+                  <a:srgbClr val="6B6258"/>
+                </a:solidFill>
+                <a:latin typeface="楷体"/>
+                <a:ea typeface="楷体"/>
+                <a:cs typeface="楷体"/>
               </a:rPr>
-              <a:t>Step 5 迁移</a:t>
-            </a:r>
-          </a:p>
-        </p:txBody>
-      </p:sp>
-      <p:sp>
-        <p:nvSpPr>
-          <p:cNvPr id="25" name="Rounded Rectangle 24"/>
-          <p:cNvSpPr/>
-          <p:nvPr/>
-        </p:nvSpPr>
-        <p:spPr>
-          <a:xfrm>
-            <a:off x="640080" y="5486400"/>
-            <a:ext cx="10911535" cy="685800"/>
-          </a:xfrm>
-          <a:prstGeom prst="roundRect">
-            <a:avLst/>
-          </a:prstGeom>
-          <a:solidFill>
-            <a:srgbClr val="FFFFFF"/>
-          </a:solidFill>
-          <a:ln w="22860">
-            <a:solidFill>
-              <a:srgbClr val="2E7D6B"/>
-            </a:solidFill>
-          </a:ln>
-          <a:effectLst/>
-        </p:spPr>
-        <p:style>
-          <a:lnRef idx="1">
-            <a:schemeClr val="accent1"/>
-          </a:lnRef>
-          <a:fillRef idx="3">
-            <a:schemeClr val="accent1"/>
-          </a:fillRef>
-          <a:effectRef idx="2">
-            <a:schemeClr val="accent1"/>
-          </a:effectRef>
-          <a:fontRef idx="minor">
-            <a:schemeClr val="lt1"/>
-          </a:fontRef>
-        </p:style>
-        <p:txBody>
-          <a:bodyPr rtlCol="0" anchor="ctr"/>
-          <a:lstStyle/>
-          <a:p>
-            <a:pPr algn="ctr"/>
-          </a:p>
-        </p:txBody>
-      </p:sp>
-      <p:sp>
-        <p:nvSpPr>
-          <p:cNvPr id="26" name="Oval 25"/>
-          <p:cNvSpPr/>
-          <p:nvPr/>
-        </p:nvSpPr>
-        <p:spPr>
-          <a:xfrm>
-            <a:off x="804672" y="5650992"/>
-            <a:ext cx="457200" cy="457200"/>
-          </a:xfrm>
-          <a:prstGeom prst="ellipse">
-            <a:avLst/>
-          </a:prstGeom>
-          <a:solidFill>
-            <a:srgbClr val="2E7D6B"/>
-          </a:solidFill>
-          <a:ln>
-            <a:noFill/>
-          </a:ln>
-          <a:effectLst/>
-        </p:spPr>
-        <p:style>
-          <a:lnRef idx="1">
-            <a:schemeClr val="accent1"/>
-          </a:lnRef>
-          <a:fillRef idx="3">
-            <a:schemeClr val="accent1"/>
-          </a:fillRef>
-          <a:effectRef idx="2">
-            <a:schemeClr val="accent1"/>
-          </a:effectRef>
-          <a:fontRef idx="minor">
-            <a:schemeClr val="lt1"/>
-          </a:fontRef>
-        </p:style>
-        <p:txBody>
-          <a:bodyPr rtlCol="0" anchor="ctr"/>
-          <a:lstStyle/>
-          <a:p>
-            <a:pPr algn="ctr"/>
-          </a:p>
-        </p:txBody>
-      </p:sp>
-      <p:sp>
-        <p:nvSpPr>
-          <p:cNvPr id="27" name="TextBox 26"/>
-          <p:cNvSpPr txBox="1"/>
-          <p:nvPr/>
-        </p:nvSpPr>
-        <p:spPr>
-          <a:xfrm>
-            <a:off x="804672" y="5705856"/>
-            <a:ext cx="457200" cy="384048"/>
-          </a:xfrm>
-          <a:prstGeom prst="rect">
-            <a:avLst/>
-          </a:prstGeom>
-          <a:noFill/>
-        </p:spPr>
-        <p:txBody>
-          <a:bodyPr wrap="square" anchor="t" lIns="0" rIns="0" tIns="0" bIns="0">
-            <a:spAutoFit/>
-          </a:bodyPr>
-          <a:lstStyle/>
-          <a:p>
-            <a:pPr algn="ctr"/>
-            <a:r>
-              <a:rPr sz="1600" b="1">
-                <a:solidFill>
-                  <a:srgbClr val="FFFFFF"/>
-                </a:solidFill>
-                <a:latin typeface="微软雅黑"/>
-                <a:ea typeface="微软雅黑"/>
-                <a:cs typeface="微软雅黑"/>
-              </a:rPr>
-              <a:t>6</a:t>
-            </a:r>
-          </a:p>
-        </p:txBody>
-      </p:sp>
-      <p:sp>
-        <p:nvSpPr>
-          <p:cNvPr id="28" name="TextBox 27"/>
-          <p:cNvSpPr txBox="1"/>
-          <p:nvPr/>
-        </p:nvSpPr>
-        <p:spPr>
-          <a:xfrm>
-            <a:off x="1371600" y="5596128"/>
-            <a:ext cx="9997135" cy="484632"/>
-          </a:xfrm>
-          <a:prstGeom prst="rect">
-            <a:avLst/>
-          </a:prstGeom>
-          <a:noFill/>
-        </p:spPr>
-        <p:txBody>
-          <a:bodyPr wrap="square" anchor="t" lIns="0" rIns="0" tIns="0" bIns="0">
-            <a:spAutoFit/>
-          </a:bodyPr>
-          <a:lstStyle/>
-          <a:p>
-            <a:pPr algn="l">
-              <a:lnSpc>
-                <a:spcPct val="110000"/>
-              </a:lnSpc>
-            </a:pPr>
-            <a:r>
-              <a:rPr sz="1600" b="1">
-                <a:solidFill>
-                  <a:srgbClr val="1C2A33"/>
-                </a:solidFill>
-                <a:latin typeface="微软雅黑"/>
-                <a:ea typeface="微软雅黑"/>
-                <a:cs typeface="微软雅黑"/>
-              </a:rPr>
-              <a:t>Step 6 作业</a:t>
-            </a:r>
-          </a:p>
-        </p:txBody>
-      </p:sp>
-      <p:sp>
-        <p:nvSpPr>
-          <p:cNvPr id="29" name="TextBox 28"/>
+              <a:t>以上读法 / 写法可迁移到同类知识性文本。</a:t>
+            </a:r>
+          </a:p>
+        </p:txBody>
+      </p:sp>
+      <p:sp>
+        <p:nvSpPr>
+          <p:cNvPr id="22" name="TextBox 21"/>
           <p:cNvSpPr txBox="1"/>
           <p:nvPr/>
         </p:nvSpPr>
@@ -6511,51 +6445,7 @@
       <p:grpSpPr/>
       <p:sp>
         <p:nvSpPr>
-          <p:cNvPr id="2" name="Rectangle 1"/>
-          <p:cNvSpPr/>
-          <p:nvPr/>
-        </p:nvSpPr>
-        <p:spPr>
-          <a:xfrm>
-            <a:off x="0" y="0"/>
-            <a:ext cx="12191695" cy="6858000"/>
-          </a:xfrm>
-          <a:prstGeom prst="rect">
-            <a:avLst/>
-          </a:prstGeom>
-          <a:solidFill>
-            <a:srgbClr val="F4EFE6"/>
-          </a:solidFill>
-          <a:ln>
-            <a:noFill/>
-          </a:ln>
-          <a:effectLst/>
-        </p:spPr>
-        <p:style>
-          <a:lnRef idx="1">
-            <a:schemeClr val="accent1"/>
-          </a:lnRef>
-          <a:fillRef idx="3">
-            <a:schemeClr val="accent1"/>
-          </a:fillRef>
-          <a:effectRef idx="2">
-            <a:schemeClr val="accent1"/>
-          </a:effectRef>
-          <a:fontRef idx="minor">
-            <a:schemeClr val="lt1"/>
-          </a:fontRef>
-        </p:style>
-        <p:txBody>
-          <a:bodyPr rtlCol="0" anchor="ctr"/>
-          <a:lstStyle/>
-          <a:p>
-            <a:pPr algn="ctr"/>
-          </a:p>
-        </p:txBody>
-      </p:sp>
-      <p:sp>
-        <p:nvSpPr>
-          <p:cNvPr id="3" name="TextBox 2"/>
+          <p:cNvPr id="2" name="TextBox 1"/>
           <p:cNvSpPr txBox="1"/>
           <p:nvPr/>
         </p:nvSpPr>
@@ -6589,14 +6479,14 @@
                 <a:ea typeface="微软雅黑"/>
                 <a:cs typeface="微软雅黑"/>
               </a:rPr>
-              <a:t>易混易错</a:t>
-            </a:r>
-          </a:p>
-        </p:txBody>
-      </p:sp>
-      <p:sp>
-        <p:nvSpPr>
-          <p:cNvPr id="4" name="Rectangle 3"/>
+              <a:t>难点</a:t>
+            </a:r>
+          </a:p>
+        </p:txBody>
+      </p:sp>
+      <p:sp>
+        <p:nvSpPr>
+          <p:cNvPr id="3" name="Rectangle 2"/>
           <p:cNvSpPr/>
           <p:nvPr/>
         </p:nvSpPr>
@@ -6640,14 +6530,51 @@
       </p:sp>
       <p:sp>
         <p:nvSpPr>
+          <p:cNvPr id="4" name="TextBox 3"/>
+          <p:cNvSpPr txBox="1"/>
+          <p:nvPr/>
+        </p:nvSpPr>
+        <p:spPr>
+          <a:xfrm>
+            <a:off x="640080" y="1325880"/>
+            <a:ext cx="10515600" cy="548640"/>
+          </a:xfrm>
+          <a:prstGeom prst="rect">
+            <a:avLst/>
+          </a:prstGeom>
+          <a:noFill/>
+        </p:spPr>
+        <p:txBody>
+          <a:bodyPr wrap="square" anchor="t" lIns="0" rIns="0" tIns="0" bIns="0">
+            <a:spAutoFit/>
+          </a:bodyPr>
+          <a:lstStyle/>
+          <a:p>
+            <a:pPr algn="l"/>
+            <a:r>
+              <a:rPr sz="2600" b="1">
+                <a:solidFill>
+                  <a:srgbClr val="1C2A33"/>
+                </a:solidFill>
+                <a:latin typeface="楷体"/>
+                <a:ea typeface="楷体"/>
+                <a:cs typeface="楷体"/>
+              </a:rPr>
+              <a:t>难点</a:t>
+            </a:r>
+          </a:p>
+        </p:txBody>
+      </p:sp>
+      <p:sp>
+        <p:nvSpPr>
           <p:cNvPr id="5" name="Rounded Rectangle 4"/>
           <p:cNvSpPr/>
           <p:nvPr/>
         </p:nvSpPr>
         <p:spPr>
           <a:xfrm>
-            <a:off x="640080" y="1417320"/>
-            <a:ext cx="5349240" cy="2057400"/>
+            <a:off x="640080" y="2194560"/>
+            <a:ext cx="3393338" cy="3931920"/>
           </a:xfrm>
           <a:prstGeom prst="roundRect">
             <a:avLst/>
@@ -6655,7 +6582,7 @@
           <a:solidFill>
             <a:srgbClr val="FFFFFF"/>
           </a:solidFill>
-          <a:ln w="22860">
+          <a:ln w="20320">
             <a:solidFill>
               <a:srgbClr val="B23A2A"/>
             </a:solidFill>
@@ -6692,8 +6619,8 @@
         </p:nvSpPr>
         <p:spPr>
           <a:xfrm>
-            <a:off x="804672" y="1581912"/>
-            <a:ext cx="457200" cy="457200"/>
+            <a:off x="868680" y="2450592"/>
+            <a:ext cx="548640" cy="548640"/>
           </a:xfrm>
           <a:prstGeom prst="ellipse">
             <a:avLst/>
@@ -6736,8 +6663,8 @@
         </p:nvSpPr>
         <p:spPr>
           <a:xfrm>
-            <a:off x="804672" y="1636776"/>
-            <a:ext cx="457200" cy="384048"/>
+            <a:off x="868680" y="2514600"/>
+            <a:ext cx="548640" cy="411480"/>
           </a:xfrm>
           <a:prstGeom prst="rect">
             <a:avLst/>
@@ -6752,7 +6679,7 @@
           <a:p>
             <a:pPr algn="ctr"/>
             <a:r>
-              <a:rPr sz="1600" b="1">
+              <a:rPr sz="2000" b="1">
                 <a:solidFill>
                   <a:srgbClr val="FFFFFF"/>
                 </a:solidFill>
@@ -6760,7 +6687,7 @@
                 <a:ea typeface="微软雅黑"/>
                 <a:cs typeface="微软雅黑"/>
               </a:rPr>
-              <a:t>!</a:t>
+              <a:t>1</a:t>
             </a:r>
           </a:p>
         </p:txBody>
@@ -6773,8 +6700,8 @@
         </p:nvSpPr>
         <p:spPr>
           <a:xfrm>
-            <a:off x="1371600" y="1527048"/>
-            <a:ext cx="4434840" cy="457200"/>
+            <a:off x="1554480" y="2468880"/>
+            <a:ext cx="2296058" cy="777240"/>
           </a:xfrm>
           <a:prstGeom prst="rect">
             <a:avLst/>
@@ -6789,52 +6716,11 @@
           <a:p>
             <a:pPr algn="l">
               <a:lnSpc>
-                <a:spcPct val="110000"/>
+                <a:spcPct val="135000"/>
               </a:lnSpc>
             </a:pPr>
             <a:r>
-              <a:rPr sz="1600" b="1">
-                <a:solidFill>
-                  <a:srgbClr val="1C2A33"/>
-                </a:solidFill>
-                <a:latin typeface="微软雅黑"/>
-                <a:ea typeface="微软雅黑"/>
-                <a:cs typeface="微软雅黑"/>
-              </a:rPr>
-              <a:t/>
-            </a:r>
-          </a:p>
-        </p:txBody>
-      </p:sp>
-      <p:sp>
-        <p:nvSpPr>
-          <p:cNvPr id="9" name="TextBox 8"/>
-          <p:cNvSpPr txBox="1"/>
-          <p:nvPr/>
-        </p:nvSpPr>
-        <p:spPr>
-          <a:xfrm>
-            <a:off x="1371600" y="1965960"/>
-            <a:ext cx="4434840" cy="1417320"/>
-          </a:xfrm>
-          <a:prstGeom prst="rect">
-            <a:avLst/>
-          </a:prstGeom>
-          <a:noFill/>
-        </p:spPr>
-        <p:txBody>
-          <a:bodyPr wrap="square" anchor="t" lIns="0" rIns="0" tIns="0" bIns="0">
-            <a:spAutoFit/>
-          </a:bodyPr>
-          <a:lstStyle/>
-          <a:p>
-            <a:pPr algn="l">
-              <a:lnSpc>
-                <a:spcPct val="128000"/>
-              </a:lnSpc>
-            </a:pPr>
-            <a:r>
-              <a:rPr sz="1400" b="0">
+              <a:rPr sz="1450" b="1">
                 <a:solidFill>
                   <a:srgbClr val="1C2A33"/>
                 </a:solidFill>
@@ -6849,14 +6735,14 @@
       </p:sp>
       <p:sp>
         <p:nvSpPr>
-          <p:cNvPr id="10" name="Rounded Rectangle 9"/>
+          <p:cNvPr id="9" name="Rounded Rectangle 8"/>
           <p:cNvSpPr/>
           <p:nvPr/>
         </p:nvSpPr>
         <p:spPr>
           <a:xfrm>
-            <a:off x="6263640" y="1417320"/>
-            <a:ext cx="5349240" cy="2057400"/>
+            <a:off x="4399178" y="2194560"/>
+            <a:ext cx="3393338" cy="3931920"/>
           </a:xfrm>
           <a:prstGeom prst="roundRect">
             <a:avLst/>
@@ -6864,9 +6750,9 @@
           <a:solidFill>
             <a:srgbClr val="FFFFFF"/>
           </a:solidFill>
-          <a:ln w="22860">
+          <a:ln w="20320">
             <a:solidFill>
-              <a:srgbClr val="B23A2A"/>
+              <a:srgbClr val="2E7D6B"/>
             </a:solidFill>
           </a:ln>
           <a:effectLst/>
@@ -6895,20 +6781,20 @@
       </p:sp>
       <p:sp>
         <p:nvSpPr>
-          <p:cNvPr id="11" name="Oval 10"/>
+          <p:cNvPr id="10" name="Oval 9"/>
           <p:cNvSpPr/>
           <p:nvPr/>
         </p:nvSpPr>
         <p:spPr>
           <a:xfrm>
-            <a:off x="6428232" y="1581912"/>
-            <a:ext cx="457200" cy="457200"/>
+            <a:off x="4627778" y="2450592"/>
+            <a:ext cx="548640" cy="548640"/>
           </a:xfrm>
           <a:prstGeom prst="ellipse">
             <a:avLst/>
           </a:prstGeom>
           <a:solidFill>
-            <a:srgbClr val="B23A2A"/>
+            <a:srgbClr val="2E7D6B"/>
           </a:solidFill>
           <a:ln>
             <a:noFill/>
@@ -6939,14 +6825,14 @@
       </p:sp>
       <p:sp>
         <p:nvSpPr>
-          <p:cNvPr id="12" name="TextBox 11"/>
+          <p:cNvPr id="11" name="TextBox 10"/>
           <p:cNvSpPr txBox="1"/>
           <p:nvPr/>
         </p:nvSpPr>
         <p:spPr>
           <a:xfrm>
-            <a:off x="6428232" y="1636776"/>
-            <a:ext cx="457200" cy="384048"/>
+            <a:off x="4627778" y="2514600"/>
+            <a:ext cx="548640" cy="411480"/>
           </a:xfrm>
           <a:prstGeom prst="rect">
             <a:avLst/>
@@ -6961,7 +6847,7 @@
           <a:p>
             <a:pPr algn="ctr"/>
             <a:r>
-              <a:rPr sz="1600" b="1">
+              <a:rPr sz="2000" b="1">
                 <a:solidFill>
                   <a:srgbClr val="FFFFFF"/>
                 </a:solidFill>
@@ -6969,21 +6855,21 @@
                 <a:ea typeface="微软雅黑"/>
                 <a:cs typeface="微软雅黑"/>
               </a:rPr>
-              <a:t>!</a:t>
-            </a:r>
-          </a:p>
-        </p:txBody>
-      </p:sp>
-      <p:sp>
-        <p:nvSpPr>
-          <p:cNvPr id="13" name="TextBox 12"/>
+              <a:t>2</a:t>
+            </a:r>
+          </a:p>
+        </p:txBody>
+      </p:sp>
+      <p:sp>
+        <p:nvSpPr>
+          <p:cNvPr id="12" name="TextBox 11"/>
           <p:cNvSpPr txBox="1"/>
           <p:nvPr/>
         </p:nvSpPr>
         <p:spPr>
           <a:xfrm>
-            <a:off x="6995160" y="1527048"/>
-            <a:ext cx="4434840" cy="457200"/>
+            <a:off x="5313578" y="2468880"/>
+            <a:ext cx="2296058" cy="777240"/>
           </a:xfrm>
           <a:prstGeom prst="rect">
             <a:avLst/>
@@ -6998,52 +6884,11 @@
           <a:p>
             <a:pPr algn="l">
               <a:lnSpc>
-                <a:spcPct val="110000"/>
+                <a:spcPct val="135000"/>
               </a:lnSpc>
             </a:pPr>
             <a:r>
-              <a:rPr sz="1600" b="1">
-                <a:solidFill>
-                  <a:srgbClr val="1C2A33"/>
-                </a:solidFill>
-                <a:latin typeface="微软雅黑"/>
-                <a:ea typeface="微软雅黑"/>
-                <a:cs typeface="微软雅黑"/>
-              </a:rPr>
-              <a:t/>
-            </a:r>
-          </a:p>
-        </p:txBody>
-      </p:sp>
-      <p:sp>
-        <p:nvSpPr>
-          <p:cNvPr id="14" name="TextBox 13"/>
-          <p:cNvSpPr txBox="1"/>
-          <p:nvPr/>
-        </p:nvSpPr>
-        <p:spPr>
-          <a:xfrm>
-            <a:off x="6995160" y="1965960"/>
-            <a:ext cx="4434840" cy="1417320"/>
-          </a:xfrm>
-          <a:prstGeom prst="rect">
-            <a:avLst/>
-          </a:prstGeom>
-          <a:noFill/>
-        </p:spPr>
-        <p:txBody>
-          <a:bodyPr wrap="square" anchor="t" lIns="0" rIns="0" tIns="0" bIns="0">
-            <a:spAutoFit/>
-          </a:bodyPr>
-          <a:lstStyle/>
-          <a:p>
-            <a:pPr algn="l">
-              <a:lnSpc>
-                <a:spcPct val="128000"/>
-              </a:lnSpc>
-            </a:pPr>
-            <a:r>
-              <a:rPr sz="1400" b="0">
+              <a:rPr sz="1450" b="1">
                 <a:solidFill>
                   <a:srgbClr val="1C2A33"/>
                 </a:solidFill>
@@ -7058,14 +6903,14 @@
       </p:sp>
       <p:sp>
         <p:nvSpPr>
-          <p:cNvPr id="15" name="Rounded Rectangle 14"/>
+          <p:cNvPr id="13" name="Rounded Rectangle 12"/>
           <p:cNvSpPr/>
           <p:nvPr/>
         </p:nvSpPr>
         <p:spPr>
           <a:xfrm>
-            <a:off x="640080" y="3703320"/>
-            <a:ext cx="5349240" cy="2057400"/>
+            <a:off x="8158276" y="2194560"/>
+            <a:ext cx="3393338" cy="3931920"/>
           </a:xfrm>
           <a:prstGeom prst="roundRect">
             <a:avLst/>
@@ -7073,9 +6918,9 @@
           <a:solidFill>
             <a:srgbClr val="FFFFFF"/>
           </a:solidFill>
-          <a:ln w="22860">
+          <a:ln w="20320">
             <a:solidFill>
-              <a:srgbClr val="B23A2A"/>
+              <a:srgbClr val="C8A86B"/>
             </a:solidFill>
           </a:ln>
           <a:effectLst/>
@@ -7104,20 +6949,20 @@
       </p:sp>
       <p:sp>
         <p:nvSpPr>
-          <p:cNvPr id="16" name="Oval 15"/>
+          <p:cNvPr id="14" name="Oval 13"/>
           <p:cNvSpPr/>
           <p:nvPr/>
         </p:nvSpPr>
         <p:spPr>
           <a:xfrm>
-            <a:off x="804672" y="3867912"/>
-            <a:ext cx="457200" cy="457200"/>
+            <a:off x="8386876" y="2450592"/>
+            <a:ext cx="548640" cy="548640"/>
           </a:xfrm>
           <a:prstGeom prst="ellipse">
             <a:avLst/>
           </a:prstGeom>
           <a:solidFill>
-            <a:srgbClr val="B23A2A"/>
+            <a:srgbClr val="C8A86B"/>
           </a:solidFill>
           <a:ln>
             <a:noFill/>
@@ -7148,14 +6993,14 @@
       </p:sp>
       <p:sp>
         <p:nvSpPr>
-          <p:cNvPr id="17" name="TextBox 16"/>
+          <p:cNvPr id="15" name="TextBox 14"/>
           <p:cNvSpPr txBox="1"/>
           <p:nvPr/>
         </p:nvSpPr>
         <p:spPr>
           <a:xfrm>
-            <a:off x="804672" y="3922776"/>
-            <a:ext cx="457200" cy="384048"/>
+            <a:off x="8386876" y="2514600"/>
+            <a:ext cx="548640" cy="411480"/>
           </a:xfrm>
           <a:prstGeom prst="rect">
             <a:avLst/>
@@ -7170,7 +7015,7 @@
           <a:p>
             <a:pPr algn="ctr"/>
             <a:r>
-              <a:rPr sz="1600" b="1">
+              <a:rPr sz="2000" b="1">
                 <a:solidFill>
                   <a:srgbClr val="FFFFFF"/>
                 </a:solidFill>
@@ -7178,21 +7023,21 @@
                 <a:ea typeface="微软雅黑"/>
                 <a:cs typeface="微软雅黑"/>
               </a:rPr>
-              <a:t>!</a:t>
-            </a:r>
-          </a:p>
-        </p:txBody>
-      </p:sp>
-      <p:sp>
-        <p:nvSpPr>
-          <p:cNvPr id="18" name="TextBox 17"/>
+              <a:t>3</a:t>
+            </a:r>
+          </a:p>
+        </p:txBody>
+      </p:sp>
+      <p:sp>
+        <p:nvSpPr>
+          <p:cNvPr id="16" name="TextBox 15"/>
           <p:cNvSpPr txBox="1"/>
           <p:nvPr/>
         </p:nvSpPr>
         <p:spPr>
           <a:xfrm>
-            <a:off x="1371600" y="3813048"/>
-            <a:ext cx="4434840" cy="457200"/>
+            <a:off x="9072676" y="2468880"/>
+            <a:ext cx="2296058" cy="777240"/>
           </a:xfrm>
           <a:prstGeom prst="rect">
             <a:avLst/>
@@ -7207,52 +7052,11 @@
           <a:p>
             <a:pPr algn="l">
               <a:lnSpc>
-                <a:spcPct val="110000"/>
+                <a:spcPct val="135000"/>
               </a:lnSpc>
             </a:pPr>
             <a:r>
-              <a:rPr sz="1600" b="1">
-                <a:solidFill>
-                  <a:srgbClr val="1C2A33"/>
-                </a:solidFill>
-                <a:latin typeface="微软雅黑"/>
-                <a:ea typeface="微软雅黑"/>
-                <a:cs typeface="微软雅黑"/>
-              </a:rPr>
-              <a:t/>
-            </a:r>
-          </a:p>
-        </p:txBody>
-      </p:sp>
-      <p:sp>
-        <p:nvSpPr>
-          <p:cNvPr id="19" name="TextBox 18"/>
-          <p:cNvSpPr txBox="1"/>
-          <p:nvPr/>
-        </p:nvSpPr>
-        <p:spPr>
-          <a:xfrm>
-            <a:off x="1371600" y="4251960"/>
-            <a:ext cx="4434840" cy="1417320"/>
-          </a:xfrm>
-          <a:prstGeom prst="rect">
-            <a:avLst/>
-          </a:prstGeom>
-          <a:noFill/>
-        </p:spPr>
-        <p:txBody>
-          <a:bodyPr wrap="square" anchor="t" lIns="0" rIns="0" tIns="0" bIns="0">
-            <a:spAutoFit/>
-          </a:bodyPr>
-          <a:lstStyle/>
-          <a:p>
-            <a:pPr algn="l">
-              <a:lnSpc>
-                <a:spcPct val="128000"/>
-              </a:lnSpc>
-            </a:pPr>
-            <a:r>
-              <a:rPr sz="1400" b="0">
+              <a:rPr sz="1450" b="1">
                 <a:solidFill>
                   <a:srgbClr val="1C2A33"/>
                 </a:solidFill>
@@ -7267,7 +7071,7 @@
       </p:sp>
       <p:sp>
         <p:nvSpPr>
-          <p:cNvPr id="20" name="TextBox 19"/>
+          <p:cNvPr id="17" name="TextBox 16"/>
           <p:cNvSpPr txBox="1"/>
           <p:nvPr/>
         </p:nvSpPr>
@@ -7394,13 +7198,13 @@
             <a:r>
               <a:rPr sz="1300" b="1">
                 <a:solidFill>
-                  <a:srgbClr val="C8A86B"/>
+                  <a:srgbClr val="B23A2A"/>
                 </a:solidFill>
                 <a:latin typeface="微软雅黑"/>
                 <a:ea typeface="微软雅黑"/>
                 <a:cs typeface="微软雅黑"/>
               </a:rPr>
-              <a:t>要点板书</a:t>
+              <a:t>板书精华</a:t>
             </a:r>
           </a:p>
         </p:txBody>
@@ -7420,7 +7224,7 @@
             <a:avLst/>
           </a:prstGeom>
           <a:solidFill>
-            <a:srgbClr val="C8A86B"/>
+            <a:srgbClr val="B23A2A"/>
           </a:solidFill>
           <a:ln>
             <a:noFill/>
@@ -7457,8 +7261,8 @@
         </p:nvSpPr>
         <p:spPr>
           <a:xfrm>
-            <a:off x="640080" y="1417320"/>
-            <a:ext cx="10911535" cy="5394960"/>
+            <a:off x="640080" y="1691640"/>
+            <a:ext cx="10911535" cy="4617720"/>
           </a:xfrm>
           <a:prstGeom prst="roundRect">
             <a:avLst/>
@@ -7466,9 +7270,9 @@
           <a:solidFill>
             <a:srgbClr val="FFFFFF"/>
           </a:solidFill>
-          <a:ln w="25400">
+          <a:ln w="12700">
             <a:solidFill>
-              <a:srgbClr val="C8A86B"/>
+              <a:srgbClr val="6B6258"/>
             </a:solidFill>
           </a:ln>
           <a:effectLst/>
@@ -7497,14 +7301,55 @@
       </p:sp>
       <p:sp>
         <p:nvSpPr>
-          <p:cNvPr id="6" name="TextBox 5"/>
+          <p:cNvPr id="6" name="Rectangle 5"/>
+          <p:cNvSpPr/>
+          <p:nvPr/>
+        </p:nvSpPr>
+        <p:spPr>
+          <a:xfrm>
+            <a:off x="640080" y="1691640"/>
+            <a:ext cx="10911535" cy="502920"/>
+          </a:xfrm>
+          <a:prstGeom prst="rect">
+            <a:avLst/>
+          </a:prstGeom>
+          <a:solidFill>
+            <a:srgbClr val="1C2A33"/>
+          </a:solidFill>
+          <a:effectLst/>
+        </p:spPr>
+        <p:style>
+          <a:lnRef idx="1">
+            <a:schemeClr val="accent1"/>
+          </a:lnRef>
+          <a:fillRef idx="3">
+            <a:schemeClr val="accent1"/>
+          </a:fillRef>
+          <a:effectRef idx="2">
+            <a:schemeClr val="accent1"/>
+          </a:effectRef>
+          <a:fontRef idx="minor">
+            <a:schemeClr val="lt1"/>
+          </a:fontRef>
+        </p:style>
+        <p:txBody>
+          <a:bodyPr rtlCol="0" anchor="ctr"/>
+          <a:lstStyle/>
+          <a:p>
+            <a:pPr algn="ctr"/>
+          </a:p>
+        </p:txBody>
+      </p:sp>
+      <p:sp>
+        <p:nvSpPr>
+          <p:cNvPr id="7" name="TextBox 6"/>
           <p:cNvSpPr txBox="1"/>
           <p:nvPr/>
         </p:nvSpPr>
         <p:spPr>
           <a:xfrm>
-            <a:off x="914400" y="1554480"/>
-            <a:ext cx="10362895" cy="5120640"/>
+            <a:off x="914400" y="1755648"/>
+            <a:ext cx="7315200" cy="365760"/>
           </a:xfrm>
           <a:prstGeom prst="rect">
             <a:avLst/>
@@ -7517,43 +7362,68 @@
           </a:bodyPr>
           <a:lstStyle/>
           <a:p>
-            <a:pPr algn="l">
-              <a:lnSpc>
-                <a:spcPct val="110000"/>
-              </a:lnSpc>
-              <a:spcAft>
-                <a:spcPts val="100"/>
-              </a:spcAft>
-            </a:pPr>
-            <a:r>
-              <a:rPr sz="1300" b="0">
-                <a:solidFill>
-                  <a:srgbClr val="1C2A33"/>
+            <a:pPr algn="l"/>
+            <a:r>
+              <a:rPr sz="1500" b="1">
+                <a:solidFill>
+                  <a:srgbClr val="C8A86B"/>
                 </a:solidFill>
                 <a:latin typeface="微软雅黑"/>
                 <a:ea typeface="微软雅黑"/>
                 <a:cs typeface="微软雅黑"/>
               </a:rPr>
-              <a:t>┌── 科学表达群文 ──┐
-│ 同:科学·异:表达 │
-│ │
-│ 【双栏】 │
-│ 人称:三↔一 │
-│ 顺序:过程↔成长 │
-│ 语言:平实↔说理 │
-│ 精神:谦逊↔志趣 │
-│ │
-│ 范式: │
-│ 纪实型↔自述型 │
-│ 共性:事实服人 │
-└────────────────┘</a:t>
-            </a:r>
-          </a:p>
-        </p:txBody>
-      </p:sp>
-      <p:sp>
-        <p:nvSpPr>
-          <p:cNvPr id="7" name="TextBox 6"/>
+              <a:t>群文阅读——科学精神与科学表达比较</a:t>
+            </a:r>
+          </a:p>
+        </p:txBody>
+      </p:sp>
+      <p:sp>
+        <p:nvSpPr>
+          <p:cNvPr id="8" name="TextBox 7"/>
+          <p:cNvSpPr txBox="1"/>
+          <p:nvPr/>
+        </p:nvSpPr>
+        <p:spPr>
+          <a:xfrm>
+            <a:off x="960120" y="2331720"/>
+            <a:ext cx="10271455" cy="3840480"/>
+          </a:xfrm>
+          <a:prstGeom prst="rect">
+            <a:avLst/>
+          </a:prstGeom>
+          <a:noFill/>
+        </p:spPr>
+        <p:txBody>
+          <a:bodyPr wrap="square" anchor="t" lIns="0" rIns="0" tIns="0" bIns="0">
+            <a:spAutoFit/>
+          </a:bodyPr>
+          <a:lstStyle/>
+          <a:p>
+            <a:pPr algn="l">
+              <a:lnSpc>
+                <a:spcPct val="140000"/>
+              </a:lnSpc>
+              <a:spcAft>
+                <a:spcPts val="400"/>
+              </a:spcAft>
+            </a:pPr>
+            <a:r>
+              <a:rPr sz="1400" b="0">
+                <a:solidFill>
+                  <a:srgbClr val="1C2A33"/>
+                </a:solidFill>
+                <a:latin typeface="楷体"/>
+                <a:ea typeface="楷体"/>
+                <a:cs typeface="楷体"/>
+              </a:rPr>
+              <a:t>科学表达群文 同:科学 异:表达 【双栏】 人称:三 / 一 顺序:过程 / 成长 语言:平实 / 说理 精神:谦逊 / 志趣 范式: 纪实型 / 自述型 共性:事实服人</a:t>
+            </a:r>
+          </a:p>
+        </p:txBody>
+      </p:sp>
+      <p:sp>
+        <p:nvSpPr>
+          <p:cNvPr id="9" name="TextBox 8"/>
           <p:cNvSpPr txBox="1"/>
           <p:nvPr/>
         </p:nvSpPr>
@@ -7680,13 +7550,13 @@
             <a:r>
               <a:rPr sz="1300" b="1">
                 <a:solidFill>
-                  <a:srgbClr val="2E7D6B"/>
+                  <a:srgbClr val="B23A2A"/>
                 </a:solidFill>
                 <a:latin typeface="微软雅黑"/>
                 <a:ea typeface="微软雅黑"/>
                 <a:cs typeface="微软雅黑"/>
               </a:rPr>
-              <a:t>分层作业</a:t>
+              <a:t>作业</a:t>
             </a:r>
           </a:p>
         </p:txBody>
@@ -7706,7 +7576,7 @@
             <a:avLst/>
           </a:prstGeom>
           <a:solidFill>
-            <a:srgbClr val="2E7D6B"/>
+            <a:srgbClr val="B23A2A"/>
           </a:solidFill>
           <a:ln>
             <a:noFill/>
@@ -7743,8 +7613,8 @@
         </p:nvSpPr>
         <p:spPr>
           <a:xfrm>
-            <a:off x="640080" y="1417320"/>
-            <a:ext cx="10911535" cy="1417320"/>
+            <a:off x="640080" y="1737360"/>
+            <a:ext cx="5227167" cy="4389120"/>
           </a:xfrm>
           <a:prstGeom prst="roundRect">
             <a:avLst/>
@@ -7752,7 +7622,53 @@
           <a:solidFill>
             <a:srgbClr val="FFFFFF"/>
           </a:solidFill>
-          <a:ln w="22860">
+          <a:ln w="20320">
+            <a:solidFill>
+              <a:srgbClr val="B23A2A"/>
+            </a:solidFill>
+          </a:ln>
+          <a:effectLst/>
+        </p:spPr>
+        <p:style>
+          <a:lnRef idx="1">
+            <a:schemeClr val="accent1"/>
+          </a:lnRef>
+          <a:fillRef idx="3">
+            <a:schemeClr val="accent1"/>
+          </a:fillRef>
+          <a:effectRef idx="2">
+            <a:schemeClr val="accent1"/>
+          </a:effectRef>
+          <a:fontRef idx="minor">
+            <a:schemeClr val="lt1"/>
+          </a:fontRef>
+        </p:style>
+        <p:txBody>
+          <a:bodyPr rtlCol="0" anchor="ctr"/>
+          <a:lstStyle/>
+          <a:p>
+            <a:pPr algn="ctr"/>
+          </a:p>
+        </p:txBody>
+      </p:sp>
+      <p:sp>
+        <p:nvSpPr>
+          <p:cNvPr id="6" name="Rounded Rectangle 5"/>
+          <p:cNvSpPr/>
+          <p:nvPr/>
+        </p:nvSpPr>
+        <p:spPr>
+          <a:xfrm>
+            <a:off x="6324447" y="1737360"/>
+            <a:ext cx="5227167" cy="4389120"/>
+          </a:xfrm>
+          <a:prstGeom prst="roundRect">
+            <a:avLst/>
+          </a:prstGeom>
+          <a:solidFill>
+            <a:srgbClr val="FFFFFF"/>
+          </a:solidFill>
+          <a:ln w="20320">
             <a:solidFill>
               <a:srgbClr val="2E7D6B"/>
             </a:solidFill>
@@ -7783,14 +7699,14 @@
       </p:sp>
       <p:sp>
         <p:nvSpPr>
-          <p:cNvPr id="6" name="TextBox 5"/>
+          <p:cNvPr id="7" name="TextBox 6"/>
           <p:cNvSpPr txBox="1"/>
           <p:nvPr/>
         </p:nvSpPr>
         <p:spPr>
           <a:xfrm>
-            <a:off x="1371600" y="1527048"/>
-            <a:ext cx="9997135" cy="457200"/>
+            <a:off x="914400" y="1920240"/>
+            <a:ext cx="4678527" cy="457200"/>
           </a:xfrm>
           <a:prstGeom prst="rect">
             <a:avLst/>
@@ -7803,35 +7719,31 @@
           </a:bodyPr>
           <a:lstStyle/>
           <a:p>
-            <a:pPr algn="l">
-              <a:lnSpc>
-                <a:spcPct val="110000"/>
-              </a:lnSpc>
-            </a:pPr>
-            <a:r>
-              <a:rPr sz="1600" b="1">
-                <a:solidFill>
-                  <a:srgbClr val="1C2A33"/>
+            <a:pPr algn="l"/>
+            <a:r>
+              <a:rPr sz="1700" b="1">
+                <a:solidFill>
+                  <a:srgbClr val="B23A2A"/>
                 </a:solidFill>
                 <a:latin typeface="微软雅黑"/>
                 <a:ea typeface="微软雅黑"/>
                 <a:cs typeface="微软雅黑"/>
               </a:rPr>
-              <a:t/>
-            </a:r>
-          </a:p>
-        </p:txBody>
-      </p:sp>
-      <p:sp>
-        <p:nvSpPr>
-          <p:cNvPr id="7" name="TextBox 6"/>
+              <a:t>基础 · 必做</a:t>
+            </a:r>
+          </a:p>
+        </p:txBody>
+      </p:sp>
+      <p:sp>
+        <p:nvSpPr>
+          <p:cNvPr id="8" name="TextBox 7"/>
           <p:cNvSpPr txBox="1"/>
           <p:nvPr/>
         </p:nvSpPr>
         <p:spPr>
           <a:xfrm>
-            <a:off x="1371600" y="1965960"/>
-            <a:ext cx="9997135" cy="777240"/>
+            <a:off x="914400" y="2468880"/>
+            <a:ext cx="4678527" cy="3474720"/>
           </a:xfrm>
           <a:prstGeom prst="rect">
             <a:avLst/>
@@ -7846,11 +7758,11 @@
           <a:p>
             <a:pPr algn="l">
               <a:lnSpc>
-                <a:spcPct val="128000"/>
+                <a:spcPct val="155000"/>
               </a:lnSpc>
             </a:pPr>
             <a:r>
-              <a:rPr sz="1200" b="0">
+              <a:rPr sz="1400" b="0">
                 <a:solidFill>
                   <a:srgbClr val="1C2A33"/>
                 </a:solidFill>
@@ -7858,54 +7770,9 @@
                 <a:ea typeface="楷体"/>
                 <a:cs typeface="楷体"/>
               </a:rPr>
-              <a:t>【基础作业】1. 完成双栏（人称/顺序/语言/精神）。2. 用一句话说两文范式差异。</a:t>
-            </a:r>
-          </a:p>
-        </p:txBody>
-      </p:sp>
-      <p:sp>
-        <p:nvSpPr>
-          <p:cNvPr id="8" name="Rounded Rectangle 7"/>
-          <p:cNvSpPr/>
-          <p:nvPr/>
-        </p:nvSpPr>
-        <p:spPr>
-          <a:xfrm>
-            <a:off x="640080" y="2971800"/>
-            <a:ext cx="10911535" cy="1417320"/>
-          </a:xfrm>
-          <a:prstGeom prst="roundRect">
-            <a:avLst/>
-          </a:prstGeom>
-          <a:solidFill>
-            <a:srgbClr val="FFFFFF"/>
-          </a:solidFill>
-          <a:ln w="22860">
-            <a:solidFill>
-              <a:srgbClr val="2E7D6B"/>
-            </a:solidFill>
-          </a:ln>
-          <a:effectLst/>
-        </p:spPr>
-        <p:style>
-          <a:lnRef idx="1">
-            <a:schemeClr val="accent1"/>
-          </a:lnRef>
-          <a:fillRef idx="3">
-            <a:schemeClr val="accent1"/>
-          </a:fillRef>
-          <a:effectRef idx="2">
-            <a:schemeClr val="accent1"/>
-          </a:effectRef>
-          <a:fontRef idx="minor">
-            <a:schemeClr val="lt1"/>
-          </a:fontRef>
-        </p:style>
-        <p:txBody>
-          <a:bodyPr rtlCol="0" anchor="ctr"/>
-          <a:lstStyle/>
-          <a:p>
-            <a:pPr algn="ctr"/>
+              <a:t>【基础作业】1. 完成双栏（人称/顺序/语言/精神）。2. 用一句话说两文范式差异。
+</a:t>
+            </a:r>
           </a:p>
         </p:txBody>
       </p:sp>
@@ -7917,8 +7784,8 @@
         </p:nvSpPr>
         <p:spPr>
           <a:xfrm>
-            <a:off x="1371600" y="3081528"/>
-            <a:ext cx="9997135" cy="457200"/>
+            <a:off x="6598767" y="1920240"/>
+            <a:ext cx="4678527" cy="457200"/>
           </a:xfrm>
           <a:prstGeom prst="rect">
             <a:avLst/>
@@ -7931,21 +7798,17 @@
           </a:bodyPr>
           <a:lstStyle/>
           <a:p>
-            <a:pPr algn="l">
-              <a:lnSpc>
-                <a:spcPct val="110000"/>
-              </a:lnSpc>
-            </a:pPr>
-            <a:r>
-              <a:rPr sz="1600" b="1">
-                <a:solidFill>
-                  <a:srgbClr val="1C2A33"/>
+            <a:pPr algn="l"/>
+            <a:r>
+              <a:rPr sz="1700" b="1">
+                <a:solidFill>
+                  <a:srgbClr val="2E7D6B"/>
                 </a:solidFill>
                 <a:latin typeface="微软雅黑"/>
                 <a:ea typeface="微软雅黑"/>
                 <a:cs typeface="微软雅黑"/>
               </a:rPr>
-              <a:t/>
+              <a:t>提高 · 选做</a:t>
             </a:r>
           </a:p>
         </p:txBody>
@@ -7958,8 +7821,8 @@
         </p:nvSpPr>
         <p:spPr>
           <a:xfrm>
-            <a:off x="1371600" y="3520440"/>
-            <a:ext cx="9997135" cy="777240"/>
+            <a:off x="6598767" y="2468880"/>
+            <a:ext cx="4678527" cy="3474720"/>
           </a:xfrm>
           <a:prstGeom prst="rect">
             <a:avLst/>
@@ -7974,7 +7837,7 @@
           <a:p>
             <a:pPr algn="l">
               <a:lnSpc>
-                <a:spcPct val="128000"/>
+                <a:spcPct val="155000"/>
               </a:lnSpc>
             </a:pPr>
             <a:r>
@@ -7986,7 +7849,8 @@
                 <a:ea typeface="楷体"/>
                 <a:cs typeface="楷体"/>
               </a:rPr>
-              <a:t>【提高作业】写180字比较短文，要求：①同维度；②各引一句；③提炼范式差异。</a:t>
+              <a:t>【提高作业】写180字比较短文，要求：①同维度；②各引一句；③提炼范式差异。
+</a:t>
             </a:r>
           </a:p>
         </p:txBody>
@@ -8120,13 +7984,13 @@
             <a:r>
               <a:rPr sz="1300" b="1">
                 <a:solidFill>
-                  <a:srgbClr val="C8A86B"/>
+                  <a:srgbClr val="B23A2A"/>
                 </a:solidFill>
                 <a:latin typeface="微软雅黑"/>
                 <a:ea typeface="微软雅黑"/>
                 <a:cs typeface="微软雅黑"/>
               </a:rPr>
-              <a:t>本课小结</a:t>
+              <a:t>单元小结</a:t>
             </a:r>
           </a:p>
         </p:txBody>
@@ -8146,7 +8010,7 @@
             <a:avLst/>
           </a:prstGeom>
           <a:solidFill>
-            <a:srgbClr val="C8A86B"/>
+            <a:srgbClr val="B23A2A"/>
           </a:solidFill>
           <a:ln>
             <a:noFill/>
@@ -8177,20 +8041,57 @@
       </p:sp>
       <p:sp>
         <p:nvSpPr>
-          <p:cNvPr id="5" name="Rectangle 4"/>
+          <p:cNvPr id="5" name="TextBox 4"/>
+          <p:cNvSpPr txBox="1"/>
+          <p:nvPr/>
+        </p:nvSpPr>
+        <p:spPr>
+          <a:xfrm>
+            <a:off x="640080" y="1325880"/>
+            <a:ext cx="10515600" cy="640080"/>
+          </a:xfrm>
+          <a:prstGeom prst="rect">
+            <a:avLst/>
+          </a:prstGeom>
+          <a:noFill/>
+        </p:spPr>
+        <p:txBody>
+          <a:bodyPr wrap="square" anchor="t" lIns="0" rIns="0" tIns="0" bIns="0">
+            <a:spAutoFit/>
+          </a:bodyPr>
+          <a:lstStyle/>
+          <a:p>
+            <a:pPr algn="l"/>
+            <a:r>
+              <a:rPr sz="2800" b="1">
+                <a:solidFill>
+                  <a:srgbClr val="1C2A33"/>
+                </a:solidFill>
+                <a:latin typeface="楷体"/>
+                <a:ea typeface="楷体"/>
+                <a:cs typeface="楷体"/>
+              </a:rPr>
+              <a:t>围绕单元，做一次反思</a:t>
+            </a:r>
+          </a:p>
+        </p:txBody>
+      </p:sp>
+      <p:sp>
+        <p:nvSpPr>
+          <p:cNvPr id="6" name="Rounded Rectangle 5"/>
           <p:cNvSpPr/>
           <p:nvPr/>
         </p:nvSpPr>
         <p:spPr>
           <a:xfrm>
-            <a:off x="640080" y="1737360"/>
-            <a:ext cx="54864" cy="431800"/>
-          </a:xfrm>
-          <a:prstGeom prst="rect">
+            <a:off x="640080" y="2103120"/>
+            <a:ext cx="10911535" cy="777240"/>
+          </a:xfrm>
+          <a:prstGeom prst="roundRect">
             <a:avLst/>
           </a:prstGeom>
           <a:solidFill>
-            <a:srgbClr val="C8A86B"/>
+            <a:srgbClr val="E7DFD2"/>
           </a:solidFill>
           <a:ln>
             <a:noFill/>
@@ -8221,14 +8122,134 @@
       </p:sp>
       <p:sp>
         <p:nvSpPr>
-          <p:cNvPr id="6" name="TextBox 5"/>
+          <p:cNvPr id="7" name="TextBox 6"/>
           <p:cNvSpPr txBox="1"/>
           <p:nvPr/>
         </p:nvSpPr>
         <p:spPr>
           <a:xfrm>
-            <a:off x="868680" y="1645920"/>
-            <a:ext cx="10682935" cy="2194560"/>
+            <a:off x="914400" y="2212848"/>
+            <a:ext cx="10362895" cy="548640"/>
+          </a:xfrm>
+          <a:prstGeom prst="rect">
+            <a:avLst/>
+          </a:prstGeom>
+          <a:noFill/>
+        </p:spPr>
+        <p:txBody>
+          <a:bodyPr wrap="square" anchor="t" lIns="0" rIns="0" tIns="0" bIns="0">
+            <a:spAutoFit/>
+          </a:bodyPr>
+          <a:lstStyle/>
+          <a:p>
+            <a:pPr algn="l"/>
+            <a:r>
+              <a:rPr sz="1500" b="1">
+                <a:solidFill>
+                  <a:srgbClr val="1C2A33"/>
+                </a:solidFill>
+                <a:latin typeface="微软雅黑"/>
+                <a:ea typeface="微软雅黑"/>
+                <a:cs typeface="微软雅黑"/>
+              </a:rPr>
+              <a:t>所属单元：第三单元 · 实用性阅读与交流（知识性读物）</a:t>
+            </a:r>
+          </a:p>
+        </p:txBody>
+      </p:sp>
+      <p:sp>
+        <p:nvSpPr>
+          <p:cNvPr id="8" name="Rounded Rectangle 7"/>
+          <p:cNvSpPr/>
+          <p:nvPr/>
+        </p:nvSpPr>
+        <p:spPr>
+          <a:xfrm>
+            <a:off x="640080" y="3200400"/>
+            <a:ext cx="3393338" cy="2743200"/>
+          </a:xfrm>
+          <a:prstGeom prst="roundRect">
+            <a:avLst/>
+          </a:prstGeom>
+          <a:solidFill>
+            <a:srgbClr val="FFFFFF"/>
+          </a:solidFill>
+          <a:ln w="20320">
+            <a:solidFill>
+              <a:srgbClr val="B23A2A"/>
+            </a:solidFill>
+          </a:ln>
+          <a:effectLst/>
+        </p:spPr>
+        <p:style>
+          <a:lnRef idx="1">
+            <a:schemeClr val="accent1"/>
+          </a:lnRef>
+          <a:fillRef idx="3">
+            <a:schemeClr val="accent1"/>
+          </a:fillRef>
+          <a:effectRef idx="2">
+            <a:schemeClr val="accent1"/>
+          </a:effectRef>
+          <a:fontRef idx="minor">
+            <a:schemeClr val="lt1"/>
+          </a:fontRef>
+        </p:style>
+        <p:txBody>
+          <a:bodyPr rtlCol="0" anchor="ctr"/>
+          <a:lstStyle/>
+          <a:p>
+            <a:pPr algn="ctr"/>
+          </a:p>
+        </p:txBody>
+      </p:sp>
+      <p:sp>
+        <p:nvSpPr>
+          <p:cNvPr id="9" name="TextBox 8"/>
+          <p:cNvSpPr txBox="1"/>
+          <p:nvPr/>
+        </p:nvSpPr>
+        <p:spPr>
+          <a:xfrm>
+            <a:off x="868680" y="3474720"/>
+            <a:ext cx="2936138" cy="457200"/>
+          </a:xfrm>
+          <a:prstGeom prst="rect">
+            <a:avLst/>
+          </a:prstGeom>
+          <a:noFill/>
+        </p:spPr>
+        <p:txBody>
+          <a:bodyPr wrap="square" anchor="t" lIns="0" rIns="0" tIns="0" bIns="0">
+            <a:spAutoFit/>
+          </a:bodyPr>
+          <a:lstStyle/>
+          <a:p>
+            <a:pPr algn="l"/>
+            <a:r>
+              <a:rPr sz="1500" b="1">
+                <a:solidFill>
+                  <a:srgbClr val="B23A2A"/>
+                </a:solidFill>
+                <a:latin typeface="微软雅黑"/>
+                <a:ea typeface="微软雅黑"/>
+                <a:cs typeface="微软雅黑"/>
+              </a:rPr>
+              <a:t>反思 1</a:t>
+            </a:r>
+          </a:p>
+        </p:txBody>
+      </p:sp>
+      <p:sp>
+        <p:nvSpPr>
+          <p:cNvPr id="10" name="TextBox 9"/>
+          <p:cNvSpPr txBox="1"/>
+          <p:nvPr/>
+        </p:nvSpPr>
+        <p:spPr>
+          <a:xfrm>
+            <a:off x="868680" y="4069080"/>
+            <a:ext cx="2936138" cy="1737360"/>
           </a:xfrm>
           <a:prstGeom prst="rect">
             <a:avLst/>
@@ -8245,12 +8266,9 @@
               <a:lnSpc>
                 <a:spcPct val="150000"/>
               </a:lnSpc>
-              <a:spcAft>
-                <a:spcPts val="1000"/>
-              </a:spcAft>
             </a:pPr>
             <a:r>
-              <a:rPr sz="2200" b="0">
+              <a:rPr sz="1400" b="0">
                 <a:solidFill>
                   <a:srgbClr val="1C2A33"/>
                 </a:solidFill>
@@ -8258,28 +8276,262 @@
                 <a:ea typeface="楷体"/>
                 <a:cs typeface="楷体"/>
               </a:rPr>
-              <a:t>本单元主题：实用性阅读与交流（知识性读物）。把今天学到的方法带进下一篇——自己读、自己想、自己写。</a:t>
-            </a:r>
-          </a:p>
+              <a:t>回顾本课，你最能向他人讲清哪一个要点？（如：① 青蒿素：第三人称+发现过程+准确平实+团队谦逊。）</a:t>
+            </a:r>
+          </a:p>
+        </p:txBody>
+      </p:sp>
+      <p:sp>
+        <p:nvSpPr>
+          <p:cNvPr id="11" name="Rounded Rectangle 10"/>
+          <p:cNvSpPr/>
+          <p:nvPr/>
+        </p:nvSpPr>
+        <p:spPr>
+          <a:xfrm>
+            <a:off x="4399178" y="3200400"/>
+            <a:ext cx="3393338" cy="2743200"/>
+          </a:xfrm>
+          <a:prstGeom prst="roundRect">
+            <a:avLst/>
+          </a:prstGeom>
+          <a:solidFill>
+            <a:srgbClr val="FFFFFF"/>
+          </a:solidFill>
+          <a:ln w="20320">
+            <a:solidFill>
+              <a:srgbClr val="2E7D6B"/>
+            </a:solidFill>
+          </a:ln>
+          <a:effectLst/>
+        </p:spPr>
+        <p:style>
+          <a:lnRef idx="1">
+            <a:schemeClr val="accent1"/>
+          </a:lnRef>
+          <a:fillRef idx="3">
+            <a:schemeClr val="accent1"/>
+          </a:fillRef>
+          <a:effectRef idx="2">
+            <a:schemeClr val="accent1"/>
+          </a:effectRef>
+          <a:fontRef idx="minor">
+            <a:schemeClr val="lt1"/>
+          </a:fontRef>
+        </p:style>
+        <p:txBody>
+          <a:bodyPr rtlCol="0" anchor="ctr"/>
+          <a:lstStyle/>
+          <a:p>
+            <a:pPr algn="ctr"/>
+          </a:p>
+        </p:txBody>
+      </p:sp>
+      <p:sp>
+        <p:nvSpPr>
+          <p:cNvPr id="12" name="TextBox 11"/>
+          <p:cNvSpPr txBox="1"/>
+          <p:nvPr/>
+        </p:nvSpPr>
+        <p:spPr>
+          <a:xfrm>
+            <a:off x="4627778" y="3474720"/>
+            <a:ext cx="2936138" cy="457200"/>
+          </a:xfrm>
+          <a:prstGeom prst="rect">
+            <a:avLst/>
+          </a:prstGeom>
+          <a:noFill/>
+        </p:spPr>
+        <p:txBody>
+          <a:bodyPr wrap="square" anchor="t" lIns="0" rIns="0" tIns="0" bIns="0">
+            <a:spAutoFit/>
+          </a:bodyPr>
+          <a:lstStyle/>
           <a:p>
             <a:pPr algn="l"/>
             <a:r>
-              <a:rPr sz="1600" b="1">
-                <a:solidFill>
-                  <a:srgbClr val="B23A2A"/>
+              <a:rPr sz="1500" b="1">
+                <a:solidFill>
+                  <a:srgbClr val="2E7D6B"/>
                 </a:solidFill>
                 <a:latin typeface="微软雅黑"/>
                 <a:ea typeface="微软雅黑"/>
                 <a:cs typeface="微软雅黑"/>
               </a:rPr>
-              <a:t>方法迁移：圈关键信息 → 理事件脉络 → 析人物精神</a:t>
-            </a:r>
-          </a:p>
-        </p:txBody>
-      </p:sp>
-      <p:sp>
-        <p:nvSpPr>
-          <p:cNvPr id="7" name="TextBox 6"/>
+              <a:t>反思 2</a:t>
+            </a:r>
+          </a:p>
+        </p:txBody>
+      </p:sp>
+      <p:sp>
+        <p:nvSpPr>
+          <p:cNvPr id="13" name="TextBox 12"/>
+          <p:cNvSpPr txBox="1"/>
+          <p:nvPr/>
+        </p:nvSpPr>
+        <p:spPr>
+          <a:xfrm>
+            <a:off x="4627778" y="4069080"/>
+            <a:ext cx="2936138" cy="1737360"/>
+          </a:xfrm>
+          <a:prstGeom prst="rect">
+            <a:avLst/>
+          </a:prstGeom>
+          <a:noFill/>
+        </p:spPr>
+        <p:txBody>
+          <a:bodyPr wrap="square" anchor="t" lIns="0" rIns="0" tIns="0" bIns="0">
+            <a:spAutoFit/>
+          </a:bodyPr>
+          <a:lstStyle/>
+          <a:p>
+            <a:pPr algn="l">
+              <a:lnSpc>
+                <a:spcPct val="150000"/>
+              </a:lnSpc>
+            </a:pPr>
+            <a:r>
+              <a:rPr sz="1400" b="0">
+                <a:solidFill>
+                  <a:srgbClr val="1C2A33"/>
+                </a:solidFill>
+                <a:latin typeface="楷体"/>
+                <a:ea typeface="楷体"/>
+                <a:cs typeface="楷体"/>
+              </a:rPr>
+              <a:t>把本单元几篇课文放在一起，它们共同教给我们怎样的读法？</a:t>
+            </a:r>
+          </a:p>
+        </p:txBody>
+      </p:sp>
+      <p:sp>
+        <p:nvSpPr>
+          <p:cNvPr id="14" name="Rounded Rectangle 13"/>
+          <p:cNvSpPr/>
+          <p:nvPr/>
+        </p:nvSpPr>
+        <p:spPr>
+          <a:xfrm>
+            <a:off x="8158276" y="3200400"/>
+            <a:ext cx="3393338" cy="2743200"/>
+          </a:xfrm>
+          <a:prstGeom prst="roundRect">
+            <a:avLst/>
+          </a:prstGeom>
+          <a:solidFill>
+            <a:srgbClr val="FFFFFF"/>
+          </a:solidFill>
+          <a:ln w="20320">
+            <a:solidFill>
+              <a:srgbClr val="C8A86B"/>
+            </a:solidFill>
+          </a:ln>
+          <a:effectLst/>
+        </p:spPr>
+        <p:style>
+          <a:lnRef idx="1">
+            <a:schemeClr val="accent1"/>
+          </a:lnRef>
+          <a:fillRef idx="3">
+            <a:schemeClr val="accent1"/>
+          </a:fillRef>
+          <a:effectRef idx="2">
+            <a:schemeClr val="accent1"/>
+          </a:effectRef>
+          <a:fontRef idx="minor">
+            <a:schemeClr val="lt1"/>
+          </a:fontRef>
+        </p:style>
+        <p:txBody>
+          <a:bodyPr rtlCol="0" anchor="ctr"/>
+          <a:lstStyle/>
+          <a:p>
+            <a:pPr algn="ctr"/>
+          </a:p>
+        </p:txBody>
+      </p:sp>
+      <p:sp>
+        <p:nvSpPr>
+          <p:cNvPr id="15" name="TextBox 14"/>
+          <p:cNvSpPr txBox="1"/>
+          <p:nvPr/>
+        </p:nvSpPr>
+        <p:spPr>
+          <a:xfrm>
+            <a:off x="8386876" y="3474720"/>
+            <a:ext cx="2936138" cy="457200"/>
+          </a:xfrm>
+          <a:prstGeom prst="rect">
+            <a:avLst/>
+          </a:prstGeom>
+          <a:noFill/>
+        </p:spPr>
+        <p:txBody>
+          <a:bodyPr wrap="square" anchor="t" lIns="0" rIns="0" tIns="0" bIns="0">
+            <a:spAutoFit/>
+          </a:bodyPr>
+          <a:lstStyle/>
+          <a:p>
+            <a:pPr algn="l"/>
+            <a:r>
+              <a:rPr sz="1500" b="1">
+                <a:solidFill>
+                  <a:srgbClr val="C8A86B"/>
+                </a:solidFill>
+                <a:latin typeface="微软雅黑"/>
+                <a:ea typeface="微软雅黑"/>
+                <a:cs typeface="微软雅黑"/>
+              </a:rPr>
+              <a:t>反思 3</a:t>
+            </a:r>
+          </a:p>
+        </p:txBody>
+      </p:sp>
+      <p:sp>
+        <p:nvSpPr>
+          <p:cNvPr id="16" name="TextBox 15"/>
+          <p:cNvSpPr txBox="1"/>
+          <p:nvPr/>
+        </p:nvSpPr>
+        <p:spPr>
+          <a:xfrm>
+            <a:off x="8386876" y="4069080"/>
+            <a:ext cx="2936138" cy="1737360"/>
+          </a:xfrm>
+          <a:prstGeom prst="rect">
+            <a:avLst/>
+          </a:prstGeom>
+          <a:noFill/>
+        </p:spPr>
+        <p:txBody>
+          <a:bodyPr wrap="square" anchor="t" lIns="0" rIns="0" tIns="0" bIns="0">
+            <a:spAutoFit/>
+          </a:bodyPr>
+          <a:lstStyle/>
+          <a:p>
+            <a:pPr algn="l">
+              <a:lnSpc>
+                <a:spcPct val="150000"/>
+              </a:lnSpc>
+            </a:pPr>
+            <a:r>
+              <a:rPr sz="1400" b="0">
+                <a:solidFill>
+                  <a:srgbClr val="1C2A33"/>
+                </a:solidFill>
+                <a:latin typeface="楷体"/>
+                <a:ea typeface="楷体"/>
+                <a:cs typeface="楷体"/>
+              </a:rPr>
+              <a:t>能否用今天学到的方法，去读懂一篇课外的知识性文章？</a:t>
+            </a:r>
+          </a:p>
+        </p:txBody>
+      </p:sp>
+      <p:sp>
+        <p:nvSpPr>
+          <p:cNvPr id="17" name="TextBox 16"/>
           <p:cNvSpPr txBox="1"/>
           <p:nvPr/>
         </p:nvSpPr>
